--- a/curso/pptx/S35.pptx
+++ b/curso/pptx/S35.pptx
@@ -3890,8 +3890,8 @@
         </p:nvSpPr>
         <p:spPr>
           <a:xfrm>
-            <a:off x="640000" y="420000"/>
-            <a:ext cx="10912000" cy="420000"/>
+            <a:off x="10652000" y="380000"/>
+            <a:ext cx="900000" cy="800000"/>
           </a:xfrm>
           <a:prstGeom prst="rect">
             <a:avLst/>
@@ -3906,17 +3906,17 @@
           <a:p>
             <a:pPr>
               <a:spcAft>
-                <a:spcPts val="810"/>
+                <a:spcPts val="1980"/>
               </a:spcAft>
             </a:pPr>
             <a:r>
-              <a:rPr sz="1800" b="1">
+              <a:rPr sz="4400" b="0">
                 <a:solidFill>
                   <a:srgbClr val="1F2A44"/>
                 </a:solidFill>
                 <a:latin typeface="Nunito Sans"/>
               </a:rPr>
-              <a:t>🦉 Aula de Filosofía</a:t>
+              <a:t>🙃</a:t>
             </a:r>
           </a:p>
         </p:txBody>

--- a/curso/pptx/S35.pptx
+++ b/curso/pptx/S35.pptx
@@ -471,426 +471,6 @@
     </a:lvl9pPr>
   </p:notesStyle>
 </p:notesMaster>
-</file>
-
-<file path=ppt/notesSlides/notesSlide1.xml><?xml version="1.0" encoding="utf-8"?>
-<p:notes xmlns:a="http://schemas.openxmlformats.org/drawingml/2006/main" xmlns:p="http://schemas.openxmlformats.org/presentationml/2006/main" xmlns:r="http://schemas.openxmlformats.org/officeDocument/2006/relationships">
-  <p:cSld>
-    <p:spTree>
-      <p:nvGrpSpPr>
-        <p:cNvPr id="1" name=""/>
-        <p:cNvGrpSpPr/>
-        <p:nvPr/>
-      </p:nvGrpSpPr>
-      <p:grpSpPr>
-        <a:xfrm>
-          <a:off x="0" y="0"/>
-          <a:ext cx="0" cy="0"/>
-          <a:chOff x="0" y="0"/>
-          <a:chExt cx="0" cy="0"/>
-        </a:xfrm>
-      </p:grpSpPr>
-      <p:sp>
-        <p:nvSpPr>
-          <p:cNvPr id="2" name="Slide Image Placeholder 1"/>
-          <p:cNvSpPr>
-            <a:spLocks noGrp="1"/>
-          </p:cNvSpPr>
-          <p:nvPr>
-            <p:ph type="sldImg" idx="2"/>
-          </p:nvPr>
-        </p:nvSpPr>
-        <p:spPr/>
-      </p:sp>
-      <p:sp>
-        <p:nvSpPr>
-          <p:cNvPr id="3" name="Notes Placeholder 2"/>
-          <p:cNvSpPr>
-            <a:spLocks noGrp="1"/>
-          </p:cNvSpPr>
-          <p:nvPr>
-            <p:ph type="body" idx="3" sz="quarter"/>
-          </p:nvPr>
-        </p:nvSpPr>
-        <p:spPr/>
-        <p:txBody>
-          <a:bodyPr/>
-          <a:lstStyle/>
-          <a:p>
-            <a:r>
-              <a:t>3 minutos. Sin apuntes. Es para recordar, no cuenta para nota.</a:t>
-            </a:r>
-          </a:p>
-        </p:txBody>
-      </p:sp>
-      <p:sp>
-        <p:nvSpPr>
-          <p:cNvPr id="4" name="Slide Number Placeholder 3"/>
-          <p:cNvSpPr>
-            <a:spLocks noGrp="1"/>
-          </p:cNvSpPr>
-          <p:nvPr>
-            <p:ph type="sldNum" idx="5" sz="quarter"/>
-          </p:nvPr>
-        </p:nvSpPr>
-        <p:spPr/>
-      </p:sp>
-    </p:spTree>
-  </p:cSld>
-  <p:clrMapOvr>
-    <a:masterClrMapping/>
-  </p:clrMapOvr>
-</p:notes>
-</file>
-
-<file path=ppt/notesSlides/notesSlide2.xml><?xml version="1.0" encoding="utf-8"?>
-<p:notes xmlns:a="http://schemas.openxmlformats.org/drawingml/2006/main" xmlns:p="http://schemas.openxmlformats.org/presentationml/2006/main" xmlns:r="http://schemas.openxmlformats.org/officeDocument/2006/relationships">
-  <p:cSld>
-    <p:spTree>
-      <p:nvGrpSpPr>
-        <p:cNvPr id="1" name=""/>
-        <p:cNvGrpSpPr/>
-        <p:nvPr/>
-      </p:nvGrpSpPr>
-      <p:grpSpPr>
-        <a:xfrm>
-          <a:off x="0" y="0"/>
-          <a:ext cx="0" cy="0"/>
-          <a:chOff x="0" y="0"/>
-          <a:chExt cx="0" cy="0"/>
-        </a:xfrm>
-      </p:grpSpPr>
-      <p:sp>
-        <p:nvSpPr>
-          <p:cNvPr id="2" name="Slide Image Placeholder 1"/>
-          <p:cNvSpPr>
-            <a:spLocks noGrp="1"/>
-          </p:cNvSpPr>
-          <p:nvPr>
-            <p:ph type="sldImg" idx="2"/>
-          </p:nvPr>
-        </p:nvSpPr>
-        <p:spPr/>
-      </p:sp>
-      <p:sp>
-        <p:nvSpPr>
-          <p:cNvPr id="3" name="Notes Placeholder 2"/>
-          <p:cNvSpPr>
-            <a:spLocks noGrp="1"/>
-          </p:cNvSpPr>
-          <p:nvPr>
-            <p:ph type="body" idx="3" sz="quarter"/>
-          </p:nvPr>
-        </p:nvSpPr>
-        <p:spPr/>
-        <p:txBody>
-          <a:bodyPr/>
-          <a:lstStyle/>
-          <a:p>
-            <a:r>
-              <a:t>3 minutos. Sin apuntes. Es para recordar, no cuenta para nota.</a:t>
-            </a:r>
-          </a:p>
-        </p:txBody>
-      </p:sp>
-      <p:sp>
-        <p:nvSpPr>
-          <p:cNvPr id="4" name="Slide Number Placeholder 3"/>
-          <p:cNvSpPr>
-            <a:spLocks noGrp="1"/>
-          </p:cNvSpPr>
-          <p:nvPr>
-            <p:ph type="sldNum" idx="5" sz="quarter"/>
-          </p:nvPr>
-        </p:nvSpPr>
-        <p:spPr/>
-      </p:sp>
-    </p:spTree>
-  </p:cSld>
-  <p:clrMapOvr>
-    <a:masterClrMapping/>
-  </p:clrMapOvr>
-</p:notes>
-</file>
-
-<file path=ppt/notesSlides/notesSlide3.xml><?xml version="1.0" encoding="utf-8"?>
-<p:notes xmlns:a="http://schemas.openxmlformats.org/drawingml/2006/main" xmlns:p="http://schemas.openxmlformats.org/presentationml/2006/main" xmlns:r="http://schemas.openxmlformats.org/officeDocument/2006/relationships">
-  <p:cSld>
-    <p:spTree>
-      <p:nvGrpSpPr>
-        <p:cNvPr id="1" name=""/>
-        <p:cNvGrpSpPr/>
-        <p:nvPr/>
-      </p:nvGrpSpPr>
-      <p:grpSpPr>
-        <a:xfrm>
-          <a:off x="0" y="0"/>
-          <a:ext cx="0" cy="0"/>
-          <a:chOff x="0" y="0"/>
-          <a:chExt cx="0" cy="0"/>
-        </a:xfrm>
-      </p:grpSpPr>
-      <p:sp>
-        <p:nvSpPr>
-          <p:cNvPr id="2" name="Slide Image Placeholder 1"/>
-          <p:cNvSpPr>
-            <a:spLocks noGrp="1"/>
-          </p:cNvSpPr>
-          <p:nvPr>
-            <p:ph type="sldImg" idx="2"/>
-          </p:nvPr>
-        </p:nvSpPr>
-        <p:spPr/>
-      </p:sp>
-      <p:sp>
-        <p:nvSpPr>
-          <p:cNvPr id="3" name="Notes Placeholder 2"/>
-          <p:cNvSpPr>
-            <a:spLocks noGrp="1"/>
-          </p:cNvSpPr>
-          <p:nvPr>
-            <p:ph type="body" idx="3" sz="quarter"/>
-          </p:nvPr>
-        </p:nvSpPr>
-        <p:spPr/>
-        <p:txBody>
-          <a:bodyPr/>
-          <a:lstStyle/>
-          <a:p>
-            <a:r>
-              <a:t>Nadie tiene que contestar: solo pensarlo.</a:t>
-            </a:r>
-          </a:p>
-        </p:txBody>
-      </p:sp>
-      <p:sp>
-        <p:nvSpPr>
-          <p:cNvPr id="4" name="Slide Number Placeholder 3"/>
-          <p:cNvSpPr>
-            <a:spLocks noGrp="1"/>
-          </p:cNvSpPr>
-          <p:nvPr>
-            <p:ph type="sldNum" idx="5" sz="quarter"/>
-          </p:nvPr>
-        </p:nvSpPr>
-        <p:spPr/>
-      </p:sp>
-    </p:spTree>
-  </p:cSld>
-  <p:clrMapOvr>
-    <a:masterClrMapping/>
-  </p:clrMapOvr>
-</p:notes>
-</file>
-
-<file path=ppt/notesSlides/notesSlide4.xml><?xml version="1.0" encoding="utf-8"?>
-<p:notes xmlns:a="http://schemas.openxmlformats.org/drawingml/2006/main" xmlns:p="http://schemas.openxmlformats.org/presentationml/2006/main" xmlns:r="http://schemas.openxmlformats.org/officeDocument/2006/relationships">
-  <p:cSld>
-    <p:spTree>
-      <p:nvGrpSpPr>
-        <p:cNvPr id="1" name=""/>
-        <p:cNvGrpSpPr/>
-        <p:nvPr/>
-      </p:nvGrpSpPr>
-      <p:grpSpPr>
-        <a:xfrm>
-          <a:off x="0" y="0"/>
-          <a:ext cx="0" cy="0"/>
-          <a:chOff x="0" y="0"/>
-          <a:chExt cx="0" cy="0"/>
-        </a:xfrm>
-      </p:grpSpPr>
-      <p:sp>
-        <p:nvSpPr>
-          <p:cNvPr id="2" name="Slide Image Placeholder 1"/>
-          <p:cNvSpPr>
-            <a:spLocks noGrp="1"/>
-          </p:cNvSpPr>
-          <p:nvPr>
-            <p:ph type="sldImg" idx="2"/>
-          </p:nvPr>
-        </p:nvSpPr>
-        <p:spPr/>
-      </p:sp>
-      <p:sp>
-        <p:nvSpPr>
-          <p:cNvPr id="3" name="Notes Placeholder 2"/>
-          <p:cNvSpPr>
-            <a:spLocks noGrp="1"/>
-          </p:cNvSpPr>
-          <p:nvPr>
-            <p:ph type="body" idx="3" sz="quarter"/>
-          </p:nvPr>
-        </p:nvSpPr>
-        <p:spPr/>
-        <p:txBody>
-          <a:bodyPr/>
-          <a:lstStyle/>
-          <a:p>
-            <a:r>
-              <a:t>Dejar unos segundos para que piensen la respuesta fácil antes de enseñar los pasos.</a:t>
-            </a:r>
-          </a:p>
-        </p:txBody>
-      </p:sp>
-      <p:sp>
-        <p:nvSpPr>
-          <p:cNvPr id="4" name="Slide Number Placeholder 3"/>
-          <p:cNvSpPr>
-            <a:spLocks noGrp="1"/>
-          </p:cNvSpPr>
-          <p:nvPr>
-            <p:ph type="sldNum" idx="5" sz="quarter"/>
-          </p:nvPr>
-        </p:nvSpPr>
-        <p:spPr/>
-      </p:sp>
-    </p:spTree>
-  </p:cSld>
-  <p:clrMapOvr>
-    <a:masterClrMapping/>
-  </p:clrMapOvr>
-</p:notes>
-</file>
-
-<file path=ppt/notesSlides/notesSlide5.xml><?xml version="1.0" encoding="utf-8"?>
-<p:notes xmlns:a="http://schemas.openxmlformats.org/drawingml/2006/main" xmlns:p="http://schemas.openxmlformats.org/presentationml/2006/main" xmlns:r="http://schemas.openxmlformats.org/officeDocument/2006/relationships">
-  <p:cSld>
-    <p:spTree>
-      <p:nvGrpSpPr>
-        <p:cNvPr id="1" name=""/>
-        <p:cNvGrpSpPr/>
-        <p:nvPr/>
-      </p:nvGrpSpPr>
-      <p:grpSpPr>
-        <a:xfrm>
-          <a:off x="0" y="0"/>
-          <a:ext cx="0" cy="0"/>
-          <a:chOff x="0" y="0"/>
-          <a:chExt cx="0" cy="0"/>
-        </a:xfrm>
-      </p:grpSpPr>
-      <p:sp>
-        <p:nvSpPr>
-          <p:cNvPr id="2" name="Slide Image Placeholder 1"/>
-          <p:cNvSpPr>
-            <a:spLocks noGrp="1"/>
-          </p:cNvSpPr>
-          <p:nvPr>
-            <p:ph type="sldImg" idx="2"/>
-          </p:nvPr>
-        </p:nvSpPr>
-        <p:spPr/>
-      </p:sp>
-      <p:sp>
-        <p:nvSpPr>
-          <p:cNvPr id="3" name="Notes Placeholder 2"/>
-          <p:cNvSpPr>
-            <a:spLocks noGrp="1"/>
-          </p:cNvSpPr>
-          <p:nvPr>
-            <p:ph type="body" idx="3" sz="quarter"/>
-          </p:nvPr>
-        </p:nvSpPr>
-        <p:spPr/>
-        <p:txBody>
-          <a:bodyPr/>
-          <a:lstStyle/>
-          <a:p>
-            <a:r>
-              <a:t>Dejar 2 minutos para que lo escriban. La diapositiva siguiente muestra el resumen.</a:t>
-            </a:r>
-          </a:p>
-        </p:txBody>
-      </p:sp>
-      <p:sp>
-        <p:nvSpPr>
-          <p:cNvPr id="4" name="Slide Number Placeholder 3"/>
-          <p:cNvSpPr>
-            <a:spLocks noGrp="1"/>
-          </p:cNvSpPr>
-          <p:nvPr>
-            <p:ph type="sldNum" idx="5" sz="quarter"/>
-          </p:nvPr>
-        </p:nvSpPr>
-        <p:spPr/>
-      </p:sp>
-    </p:spTree>
-  </p:cSld>
-  <p:clrMapOvr>
-    <a:masterClrMapping/>
-  </p:clrMapOvr>
-</p:notes>
-</file>
-
-<file path=ppt/notesSlides/notesSlide6.xml><?xml version="1.0" encoding="utf-8"?>
-<p:notes xmlns:a="http://schemas.openxmlformats.org/drawingml/2006/main" xmlns:p="http://schemas.openxmlformats.org/presentationml/2006/main" xmlns:r="http://schemas.openxmlformats.org/officeDocument/2006/relationships">
-  <p:cSld>
-    <p:spTree>
-      <p:nvGrpSpPr>
-        <p:cNvPr id="1" name=""/>
-        <p:cNvGrpSpPr/>
-        <p:nvPr/>
-      </p:nvGrpSpPr>
-      <p:grpSpPr>
-        <a:xfrm>
-          <a:off x="0" y="0"/>
-          <a:ext cx="0" cy="0"/>
-          <a:chOff x="0" y="0"/>
-          <a:chExt cx="0" cy="0"/>
-        </a:xfrm>
-      </p:grpSpPr>
-      <p:sp>
-        <p:nvSpPr>
-          <p:cNvPr id="2" name="Slide Image Placeholder 1"/>
-          <p:cNvSpPr>
-            <a:spLocks noGrp="1"/>
-          </p:cNvSpPr>
-          <p:nvPr>
-            <p:ph type="sldImg" idx="2"/>
-          </p:nvPr>
-        </p:nvSpPr>
-        <p:spPr/>
-      </p:sp>
-      <p:sp>
-        <p:nvSpPr>
-          <p:cNvPr id="3" name="Notes Placeholder 2"/>
-          <p:cNvSpPr>
-            <a:spLocks noGrp="1"/>
-          </p:cNvSpPr>
-          <p:nvPr>
-            <p:ph type="body" idx="3" sz="quarter"/>
-          </p:nvPr>
-        </p:nvSpPr>
-        <p:spPr/>
-        <p:txBody>
-          <a:bodyPr/>
-          <a:lstStyle/>
-          <a:p>
-            <a:r>
-              <a:t>Buscar: «qué es un deepfake explicado» · «cómo detectar un deepfake»</a:t>
-            </a:r>
-          </a:p>
-        </p:txBody>
-      </p:sp>
-      <p:sp>
-        <p:nvSpPr>
-          <p:cNvPr id="4" name="Slide Number Placeholder 3"/>
-          <p:cNvSpPr>
-            <a:spLocks noGrp="1"/>
-          </p:cNvSpPr>
-          <p:nvPr>
-            <p:ph type="sldNum" idx="5" sz="quarter"/>
-          </p:nvPr>
-        </p:nvSpPr>
-        <p:spPr/>
-      </p:sp>
-    </p:spTree>
-  </p:cSld>
-  <p:clrMapOvr>
-    <a:masterClrMapping/>
-  </p:clrMapOvr>
-</p:notes>
 </file>
 
 <file path=ppt/slideLayouts/slideLayout1.xml><?xml version="1.0" encoding="utf-8"?>

--- a/curso/pptx/S35.pptx
+++ b/curso/pptx/S35.pptx
@@ -4335,7 +4335,7 @@
                 </a:solidFill>
                 <a:latin typeface="Fredoka"/>
               </a:rPr>
-              <a:t>Caso 3 · La cara de Maialen</a:t>
+              <a:t>Caso 3 · La cara de una compañera</a:t>
             </a:r>
           </a:p>
         </p:txBody>
@@ -4417,7 +4417,7 @@
                 </a:solidFill>
                 <a:latin typeface="Nunito Sans"/>
               </a:rPr>
-              <a:t>Alguien usa una aplicación para poner la cara de Maialen en un vídeo ridículo y lo pasa por el grupo de clase.</a:t>
+              <a:t>Alguien pone la cara de un presentador de la tele en un vídeo ridículo y lo sube a TikTok.</a:t>
             </a:r>
           </a:p>
         </p:txBody>
@@ -4490,7 +4490,7 @@
                 </a:solidFill>
                 <a:latin typeface="Nunito Sans"/>
               </a:rPr>
-              <a:t>Hace daño de verdad a Maialen, aunque «solo sea una broma».</a:t>
+              <a:t>Hace daño de verdad, aunque «solo sea una broma».</a:t>
             </a:r>
           </a:p>
           <a:p>
@@ -4515,7 +4515,7 @@
                 </a:solidFill>
                 <a:latin typeface="Nunito Sans"/>
               </a:rPr>
-              <a:t>Qué hago: no lo reenvío, se lo cuento a un adulto y apoyo a Maialen.</a:t>
+              <a:t>Qué hago: no lo reenvío, se lo cuento a un adulto y apoyo a esa compañera.</a:t>
             </a:r>
           </a:p>
           <a:p>

--- a/curso/pptx/S35.pptx
+++ b/curso/pptx/S35.pptx
@@ -22,6 +22,7 @@
     <p:sldId id="270" r:id="rId22"/>
     <p:sldId id="271" r:id="rId23"/>
     <p:sldId id="272" r:id="rId24"/>
+    <p:sldId id="273" r:id="rId25"/>
   </p:sldIdLst>
   <p:sldSz cx="12192000" cy="6858000" type="screen4x3"/>
   <p:notesSz cx="6858000" cy="9144000"/>
@@ -3574,7 +3575,7 @@
                 </a:solidFill>
                 <a:latin typeface="Fredoka"/>
               </a:rPr>
-              <a:t>Imágenes y vídeos manipulados</a:t>
+              <a:t>Verificar</a:t>
             </a:r>
           </a:p>
         </p:txBody>
@@ -3613,7 +3614,7 @@
                 </a:solidFill>
                 <a:latin typeface="Nunito Sans"/>
               </a:rPr>
-              <a:t>Una imagen puede engañar con recortes, montajes, sacándola de contexto o con deepfakes hechos con inteligencia artificial.</a:t>
+              <a:t>Para verificar, sal de la página y mira qué dicen otros (lectura lateral), mira la fecha y busca el origen de la imagen.</a:t>
             </a:r>
           </a:p>
         </p:txBody>
@@ -3632,7 +3633,7 @@
     <p:bg>
       <p:bgPr>
         <a:solidFill>
-          <a:srgbClr val="FBF7EF"/>
+          <a:srgbClr val="1F2A44"/>
         </a:solidFill>
         <a:effectLst/>
       </p:bgPr>
@@ -3652,8 +3653,8 @@
         </p:nvSpPr>
         <p:spPr>
           <a:xfrm>
-            <a:off x="640000" y="380000"/>
-            <a:ext cx="10912000" cy="420000"/>
+            <a:off x="640000" y="2300000"/>
+            <a:ext cx="10912000" cy="500000"/>
           </a:xfrm>
           <a:prstGeom prst="rect">
             <a:avLst/>
@@ -3668,17 +3669,17 @@
           <a:p>
             <a:pPr>
               <a:spcAft>
-                <a:spcPts val="630"/>
-              </a:spcAft>
-            </a:pPr>
-            <a:r>
-              <a:rPr sz="1400" b="1">
-                <a:solidFill>
-                  <a:srgbClr val="E8793A"/>
-                </a:solidFill>
-                <a:latin typeface="Nunito Sans"/>
-              </a:rPr>
-              <a:t>BLOQUE 2 · CASOS RESUELTOS</a:t>
+                <a:spcPts val="810"/>
+              </a:spcAft>
+            </a:pPr>
+            <a:r>
+              <a:rPr sz="1800" b="1">
+                <a:solidFill>
+                  <a:srgbClr val="F4B183"/>
+                </a:solidFill>
+                <a:latin typeface="Nunito Sans"/>
+              </a:rPr>
+              <a:t>BLOQUE 2</a:t>
             </a:r>
           </a:p>
         </p:txBody>
@@ -3691,7 +3692,7 @@
         </p:nvSpPr>
         <p:spPr>
           <a:xfrm>
-            <a:off x="640000" y="760000"/>
+            <a:off x="640000" y="2800000"/>
             <a:ext cx="10912000" cy="800000"/>
           </a:xfrm>
           <a:prstGeom prst="rect">
@@ -3707,222 +3708,17 @@
           <a:p>
             <a:pPr>
               <a:spcAft>
-                <a:spcPts val="1710"/>
-              </a:spcAft>
-            </a:pPr>
-            <a:r>
-              <a:rPr sz="3800" b="1">
-                <a:solidFill>
-                  <a:srgbClr val="1F2A44"/>
+                <a:spcPts val="2160"/>
+              </a:spcAft>
+            </a:pPr>
+            <a:r>
+              <a:rPr sz="4800" b="1">
+                <a:solidFill>
+                  <a:srgbClr val="FBF7EF"/>
                 </a:solidFill>
                 <a:latin typeface="Fredoka"/>
               </a:rPr>
-              <a:t>Caso 1 · La «pelea»</a:t>
-            </a:r>
-          </a:p>
-        </p:txBody>
-      </p:sp>
-      <p:sp>
-        <p:nvSpPr>
-          <p:cNvPr id="4" name="Rectangle 3"/>
-          <p:cNvSpPr/>
-          <p:nvPr/>
-        </p:nvSpPr>
-        <p:spPr>
-          <a:xfrm>
-            <a:off x="640000" y="1600000"/>
-            <a:ext cx="10912000" cy="1100000"/>
-          </a:xfrm>
-          <a:prstGeom prst="rect">
-            <a:avLst/>
-          </a:prstGeom>
-          <a:solidFill>
-            <a:srgbClr val="FFFFFF"/>
-          </a:solidFill>
-          <a:ln>
-            <a:noFill/>
-          </a:ln>
-        </p:spPr>
-        <p:style>
-          <a:lnRef idx="1">
-            <a:schemeClr val="accent1"/>
-          </a:lnRef>
-          <a:fillRef idx="3">
-            <a:schemeClr val="accent1"/>
-          </a:fillRef>
-          <a:effectRef idx="2">
-            <a:schemeClr val="accent1"/>
-          </a:effectRef>
-          <a:fontRef idx="minor">
-            <a:schemeClr val="lt1"/>
-          </a:fontRef>
-        </p:style>
-        <p:txBody>
-          <a:bodyPr rtlCol="0" anchor="ctr"/>
-          <a:lstStyle/>
-          <a:p>
-            <a:pPr algn="ctr"/>
-          </a:p>
-        </p:txBody>
-      </p:sp>
-      <p:sp>
-        <p:nvSpPr>
-          <p:cNvPr id="5" name="TextBox 4"/>
-          <p:cNvSpPr txBox="1"/>
-          <p:nvPr/>
-        </p:nvSpPr>
-        <p:spPr>
-          <a:xfrm>
-            <a:off x="840000" y="1650000"/>
-            <a:ext cx="10512000" cy="1000000"/>
-          </a:xfrm>
-          <a:prstGeom prst="rect">
-            <a:avLst/>
-          </a:prstGeom>
-          <a:noFill/>
-        </p:spPr>
-        <p:txBody>
-          <a:bodyPr wrap="square" anchor="ctr">
-            <a:spAutoFit/>
-          </a:bodyPr>
-          <a:lstStyle/>
-          <a:p>
-            <a:pPr>
-              <a:spcAft>
-                <a:spcPts val="1170"/>
-              </a:spcAft>
-            </a:pPr>
-            <a:r>
-              <a:rPr sz="2600" b="1">
-                <a:solidFill>
-                  <a:srgbClr val="1F2A44"/>
-                </a:solidFill>
-                <a:latin typeface="Nunito Sans"/>
-              </a:rPr>
-              <a:t>Una foto del patio muestra a dos alumnos gritándose. El texto dice: «Pelea en el instituto». La foto completa muestra a más gente: estaban ensayando una obra de teatro.</a:t>
-            </a:r>
-          </a:p>
-        </p:txBody>
-      </p:sp>
-      <p:sp>
-        <p:nvSpPr>
-          <p:cNvPr id="6" name="TextBox 5"/>
-          <p:cNvSpPr txBox="1"/>
-          <p:nvPr/>
-        </p:nvSpPr>
-        <p:spPr>
-          <a:xfrm>
-            <a:off x="640000" y="2900000"/>
-            <a:ext cx="10912000" cy="3500000"/>
-          </a:xfrm>
-          <a:prstGeom prst="rect">
-            <a:avLst/>
-          </a:prstGeom>
-          <a:noFill/>
-        </p:spPr>
-        <p:txBody>
-          <a:bodyPr wrap="square">
-            <a:spAutoFit/>
-          </a:bodyPr>
-          <a:lstStyle/>
-          <a:p>
-            <a:pPr>
-              <a:spcAft>
-                <a:spcPts val="1080"/>
-              </a:spcAft>
-            </a:pPr>
-            <a:r>
-              <a:rPr sz="2400" b="1">
-                <a:solidFill>
-                  <a:srgbClr val="E8793A"/>
-                </a:solidFill>
-                <a:latin typeface="Nunito Sans"/>
-              </a:rPr>
-              <a:t>1. </a:t>
-            </a:r>
-            <a:r>
-              <a:rPr sz="2400" b="0">
-                <a:solidFill>
-                  <a:srgbClr val="1F2A44"/>
-                </a:solidFill>
-                <a:latin typeface="Nunito Sans"/>
-              </a:rPr>
-              <a:t>¿Qué truco es? Un recorte: se ha quitado lo que explicaba la escena.</a:t>
-            </a:r>
-          </a:p>
-          <a:p>
-            <a:pPr>
-              <a:spcAft>
-                <a:spcPts val="1080"/>
-              </a:spcAft>
-            </a:pPr>
-            <a:r>
-              <a:rPr sz="2400" b="1">
-                <a:solidFill>
-                  <a:srgbClr val="E8793A"/>
-                </a:solidFill>
-                <a:latin typeface="Nunito Sans"/>
-              </a:rPr>
-              <a:t>2. </a:t>
-            </a:r>
-            <a:r>
-              <a:rPr sz="2400" b="0">
-                <a:solidFill>
-                  <a:srgbClr val="1F2A44"/>
-                </a:solidFill>
-                <a:latin typeface="Nunito Sans"/>
-              </a:rPr>
-              <a:t>La foto no es falsa, pero lo que se ve está elegido para engañar.</a:t>
-            </a:r>
-          </a:p>
-          <a:p>
-            <a:pPr>
-              <a:spcAft>
-                <a:spcPts val="1080"/>
-              </a:spcAft>
-            </a:pPr>
-            <a:r>
-              <a:rPr sz="2400" b="1">
-                <a:solidFill>
-                  <a:srgbClr val="E8793A"/>
-                </a:solidFill>
-                <a:latin typeface="Nunito Sans"/>
-              </a:rPr>
-              <a:t>3. </a:t>
-            </a:r>
-            <a:r>
-              <a:rPr sz="2400" b="0">
-                <a:solidFill>
-                  <a:srgbClr val="1F2A44"/>
-                </a:solidFill>
-                <a:latin typeface="Nunito Sans"/>
-              </a:rPr>
-              <a:t>¿Cómo lo descubro? Buscando la foto completa o preguntando a quien estaba.</a:t>
-            </a:r>
-          </a:p>
-          <a:p>
-            <a:pPr>
-              <a:spcAft>
-                <a:spcPts val="1080"/>
-              </a:spcAft>
-            </a:pPr>
-            <a:r>
-              <a:rPr sz="2400" b="1">
-                <a:solidFill>
-                  <a:srgbClr val="E8793A"/>
-                </a:solidFill>
-                <a:latin typeface="Nunito Sans"/>
-              </a:rPr>
-              <a:t>4. </a:t>
-            </a:r>
-            <a:r>
-              <a:rPr sz="2400" b="0">
-                <a:solidFill>
-                  <a:srgbClr val="1F2A44"/>
-                </a:solidFill>
-                <a:latin typeface="Nunito Sans"/>
-              </a:rPr>
-              <a:t>Conclusión: lo que se queda fuera de la foto también cuenta.</a:t>
+              <a:t>Casos resueltos</a:t>
             </a:r>
           </a:p>
         </p:txBody>
@@ -4026,7 +3822,7 @@
                 </a:solidFill>
                 <a:latin typeface="Fredoka"/>
               </a:rPr>
-              <a:t>Caso 2 · La alcaldesa</a:t>
+              <a:t>Caso 1 · La web del wifi</a:t>
             </a:r>
           </a:p>
         </p:txBody>
@@ -4108,7 +3904,7 @@
                 </a:solidFill>
                 <a:latin typeface="Nunito Sans"/>
               </a:rPr>
-              <a:t>Un vídeo muestra a una alcaldesa (inventada) diciendo que mañana no hay clase en toda Bizkaia. La voz parece la suya.</a:t>
+              <a:t>La web profesional dice que el wifi del instituto daña el cerebro. Imagina que buscas su nombre en otra pestaña.</a:t>
             </a:r>
           </a:p>
         </p:txBody>
@@ -4156,7 +3952,7 @@
                 </a:solidFill>
                 <a:latin typeface="Nunito Sans"/>
               </a:rPr>
-              <a:t>Emoción y urgencia: es justo lo que muchos quieren oír.</a:t>
+              <a:t>Lectura lateral: descubres que la web vende aparatos «contra las ondas».</a:t>
             </a:r>
           </a:p>
           <a:p>
@@ -4181,7 +3977,7 @@
                 </a:solidFill>
                 <a:latin typeface="Nunito Sans"/>
               </a:rPr>
-              <a:t>El vídeo parece perfecto, pero hoy eso ya no demuestra nada.</a:t>
+              <a:t>¿Qué dicen los organismos de salud? No han encontrado daño con los niveles normales del wifi.</a:t>
             </a:r>
           </a:p>
           <a:p>
@@ -4206,7 +4002,7 @@
                 </a:solidFill>
                 <a:latin typeface="Nunito Sans"/>
               </a:rPr>
-              <a:t>¿Lo dicen su web oficial o los medios serios? No.</a:t>
+              <a:t>La web tiene un interés y va contra el consenso (sesión 7).</a:t>
             </a:r>
           </a:p>
           <a:p>
@@ -4231,7 +4027,7 @@
                 </a:solidFill>
                 <a:latin typeface="Nunito Sans"/>
               </a:rPr>
-              <a:t>Conclusión: puede ser un deepfake. Manda la fuente oficial, no lo real que parezca el vídeo.</a:t>
+              <a:t>Conclusión: el diseño bonito no era una razón. No me lo creo.</a:t>
             </a:r>
           </a:p>
         </p:txBody>
@@ -4335,7 +4131,7 @@
                 </a:solidFill>
                 <a:latin typeface="Fredoka"/>
               </a:rPr>
-              <a:t>Caso 3 · La cara de una compañera</a:t>
+              <a:t>Caso 2 · La nieve</a:t>
             </a:r>
           </a:p>
         </p:txBody>
@@ -4417,7 +4213,7 @@
                 </a:solidFill>
                 <a:latin typeface="Nunito Sans"/>
               </a:rPr>
-              <a:t>Alguien pone la cara de un presentador de la tele en un vídeo ridículo y lo sube a TikTok.</a:t>
+              <a:t>A un chico le llega: «¡Suspendidas las clases en Bizkaia por la nieve!». Nieva un poco y parece verdad.</a:t>
             </a:r>
           </a:p>
         </p:txBody>
@@ -4465,7 +4261,7 @@
                 </a:solidFill>
                 <a:latin typeface="Nunito Sans"/>
               </a:rPr>
-              <a:t>¿Qué es? Un deepfake de una persona real, sin su permiso.</a:t>
+              <a:t>Mira la fecha de la noticia: es de hace varios años.</a:t>
             </a:r>
           </a:p>
           <a:p>
@@ -4490,7 +4286,7 @@
                 </a:solidFill>
                 <a:latin typeface="Nunito Sans"/>
               </a:rPr>
-              <a:t>Hace daño de verdad, aunque «solo sea una broma».</a:t>
+              <a:t>Alguien la ha vuelto a compartir hoy.</a:t>
             </a:r>
           </a:p>
           <a:p>
@@ -4515,7 +4311,7 @@
                 </a:solidFill>
                 <a:latin typeface="Nunito Sans"/>
               </a:rPr>
-              <a:t>Qué hago: no lo reenvío, se lo cuento a un adulto y apoyo a esa compañera.</a:t>
+              <a:t>¿Lo dice hoy el Departamento de Educación o el instituto? No.</a:t>
             </a:r>
           </a:p>
           <a:p>
@@ -4540,7 +4336,7 @@
                 </a:solidFill>
                 <a:latin typeface="Nunito Sans"/>
               </a:rPr>
-              <a:t>Conclusión: pensar críticamente también es no compartir lo que hace daño.</a:t>
+              <a:t>Conclusión: noticia vieja, no nueva. Mañana hay clase.</a:t>
             </a:r>
           </a:p>
         </p:txBody>
@@ -4554,6 +4350,315 @@
 </file>
 
 <file path=ppt/slides/slide13.xml><?xml version="1.0" encoding="utf-8"?>
+<p:sld xmlns:a="http://schemas.openxmlformats.org/drawingml/2006/main" xmlns:p="http://schemas.openxmlformats.org/presentationml/2006/main" xmlns:r="http://schemas.openxmlformats.org/officeDocument/2006/relationships">
+  <p:cSld>
+    <p:bg>
+      <p:bgPr>
+        <a:solidFill>
+          <a:srgbClr val="FBF7EF"/>
+        </a:solidFill>
+        <a:effectLst/>
+      </p:bgPr>
+    </p:bg>
+    <p:spTree>
+      <p:nvGrpSpPr>
+        <p:cNvPr id="1" name=""/>
+        <p:cNvGrpSpPr/>
+        <p:nvPr/>
+      </p:nvGrpSpPr>
+      <p:grpSpPr/>
+      <p:sp>
+        <p:nvSpPr>
+          <p:cNvPr id="2" name="TextBox 1"/>
+          <p:cNvSpPr txBox="1"/>
+          <p:nvPr/>
+        </p:nvSpPr>
+        <p:spPr>
+          <a:xfrm>
+            <a:off x="640000" y="380000"/>
+            <a:ext cx="10912000" cy="420000"/>
+          </a:xfrm>
+          <a:prstGeom prst="rect">
+            <a:avLst/>
+          </a:prstGeom>
+          <a:noFill/>
+        </p:spPr>
+        <p:txBody>
+          <a:bodyPr wrap="square">
+            <a:spAutoFit/>
+          </a:bodyPr>
+          <a:lstStyle/>
+          <a:p>
+            <a:pPr>
+              <a:spcAft>
+                <a:spcPts val="630"/>
+              </a:spcAft>
+            </a:pPr>
+            <a:r>
+              <a:rPr sz="1400" b="1">
+                <a:solidFill>
+                  <a:srgbClr val="E8793A"/>
+                </a:solidFill>
+                <a:latin typeface="Nunito Sans"/>
+              </a:rPr>
+              <a:t>BLOQUE 2 · CASOS RESUELTOS</a:t>
+            </a:r>
+          </a:p>
+        </p:txBody>
+      </p:sp>
+      <p:sp>
+        <p:nvSpPr>
+          <p:cNvPr id="3" name="TextBox 2"/>
+          <p:cNvSpPr txBox="1"/>
+          <p:nvPr/>
+        </p:nvSpPr>
+        <p:spPr>
+          <a:xfrm>
+            <a:off x="640000" y="760000"/>
+            <a:ext cx="10912000" cy="800000"/>
+          </a:xfrm>
+          <a:prstGeom prst="rect">
+            <a:avLst/>
+          </a:prstGeom>
+          <a:noFill/>
+        </p:spPr>
+        <p:txBody>
+          <a:bodyPr wrap="square">
+            <a:spAutoFit/>
+          </a:bodyPr>
+          <a:lstStyle/>
+          <a:p>
+            <a:pPr>
+              <a:spcAft>
+                <a:spcPts val="1710"/>
+              </a:spcAft>
+            </a:pPr>
+            <a:r>
+              <a:rPr sz="3800" b="1">
+                <a:solidFill>
+                  <a:srgbClr val="1F2A44"/>
+                </a:solidFill>
+                <a:latin typeface="Fredoka"/>
+              </a:rPr>
+              <a:t>Caso 3 · El tiburón en la autopista</a:t>
+            </a:r>
+          </a:p>
+        </p:txBody>
+      </p:sp>
+      <p:sp>
+        <p:nvSpPr>
+          <p:cNvPr id="4" name="Rectangle 3"/>
+          <p:cNvSpPr/>
+          <p:nvPr/>
+        </p:nvSpPr>
+        <p:spPr>
+          <a:xfrm>
+            <a:off x="640000" y="1600000"/>
+            <a:ext cx="10912000" cy="1100000"/>
+          </a:xfrm>
+          <a:prstGeom prst="rect">
+            <a:avLst/>
+          </a:prstGeom>
+          <a:solidFill>
+            <a:srgbClr val="FFFFFF"/>
+          </a:solidFill>
+          <a:ln>
+            <a:noFill/>
+          </a:ln>
+        </p:spPr>
+        <p:style>
+          <a:lnRef idx="1">
+            <a:schemeClr val="accent1"/>
+          </a:lnRef>
+          <a:fillRef idx="3">
+            <a:schemeClr val="accent1"/>
+          </a:fillRef>
+          <a:effectRef idx="2">
+            <a:schemeClr val="accent1"/>
+          </a:effectRef>
+          <a:fontRef idx="minor">
+            <a:schemeClr val="lt1"/>
+          </a:fontRef>
+        </p:style>
+        <p:txBody>
+          <a:bodyPr rtlCol="0" anchor="ctr"/>
+          <a:lstStyle/>
+          <a:p>
+            <a:pPr algn="ctr"/>
+          </a:p>
+        </p:txBody>
+      </p:sp>
+      <p:sp>
+        <p:nvSpPr>
+          <p:cNvPr id="5" name="TextBox 4"/>
+          <p:cNvSpPr txBox="1"/>
+          <p:nvPr/>
+        </p:nvSpPr>
+        <p:spPr>
+          <a:xfrm>
+            <a:off x="840000" y="1650000"/>
+            <a:ext cx="10512000" cy="1000000"/>
+          </a:xfrm>
+          <a:prstGeom prst="rect">
+            <a:avLst/>
+          </a:prstGeom>
+          <a:noFill/>
+        </p:spPr>
+        <p:txBody>
+          <a:bodyPr wrap="square" anchor="ctr">
+            <a:spAutoFit/>
+          </a:bodyPr>
+          <a:lstStyle/>
+          <a:p>
+            <a:pPr>
+              <a:spcAft>
+                <a:spcPts val="1170"/>
+              </a:spcAft>
+            </a:pPr>
+            <a:r>
+              <a:rPr sz="2600" b="1">
+                <a:solidFill>
+                  <a:srgbClr val="1F2A44"/>
+                </a:solidFill>
+                <a:latin typeface="Nunito Sans"/>
+              </a:rPr>
+              <a:t>Después de muchas grandes tormentas circula la misma foto: un tiburón nadando por una autopista inundada.</a:t>
+            </a:r>
+          </a:p>
+        </p:txBody>
+      </p:sp>
+      <p:sp>
+        <p:nvSpPr>
+          <p:cNvPr id="6" name="TextBox 5"/>
+          <p:cNvSpPr txBox="1"/>
+          <p:nvPr/>
+        </p:nvSpPr>
+        <p:spPr>
+          <a:xfrm>
+            <a:off x="640000" y="2900000"/>
+            <a:ext cx="10912000" cy="3500000"/>
+          </a:xfrm>
+          <a:prstGeom prst="rect">
+            <a:avLst/>
+          </a:prstGeom>
+          <a:noFill/>
+        </p:spPr>
+        <p:txBody>
+          <a:bodyPr wrap="square">
+            <a:spAutoFit/>
+          </a:bodyPr>
+          <a:lstStyle/>
+          <a:p>
+            <a:pPr>
+              <a:spcAft>
+                <a:spcPts val="1080"/>
+              </a:spcAft>
+            </a:pPr>
+            <a:r>
+              <a:rPr sz="2400" b="1">
+                <a:solidFill>
+                  <a:srgbClr val="E8793A"/>
+                </a:solidFill>
+                <a:latin typeface="Nunito Sans"/>
+              </a:rPr>
+              <a:t>1. </a:t>
+            </a:r>
+            <a:r>
+              <a:rPr sz="2400" b="0">
+                <a:solidFill>
+                  <a:srgbClr val="1F2A44"/>
+                </a:solidFill>
+                <a:latin typeface="Nunito Sans"/>
+              </a:rPr>
+              <a:t>Hago una búsqueda inversa de la imagen.</a:t>
+            </a:r>
+          </a:p>
+          <a:p>
+            <a:pPr>
+              <a:spcAft>
+                <a:spcPts val="1080"/>
+              </a:spcAft>
+            </a:pPr>
+            <a:r>
+              <a:rPr sz="2400" b="1">
+                <a:solidFill>
+                  <a:srgbClr val="E8793A"/>
+                </a:solidFill>
+                <a:latin typeface="Nunito Sans"/>
+              </a:rPr>
+              <a:t>2. </a:t>
+            </a:r>
+            <a:r>
+              <a:rPr sz="2400" b="0">
+                <a:solidFill>
+                  <a:srgbClr val="1F2A44"/>
+                </a:solidFill>
+                <a:latin typeface="Nunito Sans"/>
+              </a:rPr>
+              <a:t>Aparece en tormentas de distintos países, desde hace más de diez años.</a:t>
+            </a:r>
+          </a:p>
+          <a:p>
+            <a:pPr>
+              <a:spcAft>
+                <a:spcPts val="1080"/>
+              </a:spcAft>
+            </a:pPr>
+            <a:r>
+              <a:rPr sz="2400" b="1">
+                <a:solidFill>
+                  <a:srgbClr val="E8793A"/>
+                </a:solidFill>
+                <a:latin typeface="Nunito Sans"/>
+              </a:rPr>
+              <a:t>3. </a:t>
+            </a:r>
+            <a:r>
+              <a:rPr sz="2400" b="0">
+                <a:solidFill>
+                  <a:srgbClr val="1F2A44"/>
+                </a:solidFill>
+                <a:latin typeface="Nunito Sans"/>
+              </a:rPr>
+              <a:t>Los verificadores explican que es un montaje: el tiburón viene de otra foto.</a:t>
+            </a:r>
+          </a:p>
+          <a:p>
+            <a:pPr>
+              <a:spcAft>
+                <a:spcPts val="1080"/>
+              </a:spcAft>
+            </a:pPr>
+            <a:r>
+              <a:rPr sz="2400" b="1">
+                <a:solidFill>
+                  <a:srgbClr val="E8793A"/>
+                </a:solidFill>
+                <a:latin typeface="Nunito Sans"/>
+              </a:rPr>
+              <a:t>4. </a:t>
+            </a:r>
+            <a:r>
+              <a:rPr sz="2400" b="0">
+                <a:solidFill>
+                  <a:srgbClr val="1F2A44"/>
+                </a:solidFill>
+                <a:latin typeface="Nunito Sans"/>
+              </a:rPr>
+              <a:t>Conclusión: imagen falsa. La búsqueda inversa lo descubre en un minuto.</a:t>
+            </a:r>
+          </a:p>
+        </p:txBody>
+      </p:sp>
+    </p:spTree>
+  </p:cSld>
+  <p:clrMapOvr>
+    <a:masterClrMapping/>
+  </p:clrMapOvr>
+</p:sld>
+</file>
+
+<file path=ppt/slides/slide14.xml><?xml version="1.0" encoding="utf-8"?>
 <p:sld xmlns:a="http://schemas.openxmlformats.org/drawingml/2006/main" xmlns:p="http://schemas.openxmlformats.org/presentationml/2006/main" xmlns:r="http://schemas.openxmlformats.org/officeDocument/2006/relationships">
   <p:cSld>
     <p:bg>
@@ -4644,7 +4749,7 @@
                 </a:solidFill>
                 <a:latin typeface="Fredoka"/>
               </a:rPr>
-              <a:t>⚠ «Es un deepfake»</a:t>
+              <a:t>⚠ La búsqueda que no encuentra nada</a:t>
             </a:r>
           </a:p>
         </p:txBody>
@@ -4726,7 +4831,7 @@
                 </a:solidFill>
                 <a:latin typeface="Nunito Sans"/>
               </a:rPr>
-              <a:t>Sale un vídeo de un entrenador (inventado) insultando a un árbitro. Él responde: «Es un deepfake, yo nunca dije eso».</a:t>
+              <a:t>Un chico hace una búsqueda inversa de una foto de una manifestación en Bilbao. No aparece en ningún otro sitio. «Entonces es real y de hoy», piensa.</a:t>
             </a:r>
           </a:p>
         </p:txBody>
@@ -4774,7 +4879,7 @@
                 </a:solidFill>
                 <a:latin typeface="Nunito Sans"/>
               </a:rPr>
-              <a:t>Si él dice que es falso, ¿ya está: es un deepfake?</a:t>
+              <a:t>Si no aparece antes en internet, ¿está comprobado que es auténtica?</a:t>
             </a:r>
           </a:p>
           <a:p>
@@ -4799,7 +4904,7 @@
                 </a:solidFill>
                 <a:latin typeface="Nunito Sans"/>
               </a:rPr>
-              <a:t>Ahora que existen los deepfakes, cualquiera puede decir «es falso» para librarse.</a:t>
+              <a:t>La búsqueda inversa solo encuentra fotos que ya están en internet.</a:t>
             </a:r>
           </a:p>
           <a:p>
@@ -4824,7 +4929,7 @@
                 </a:solidFill>
                 <a:latin typeface="Nunito Sans"/>
               </a:rPr>
-              <a:t>Busco la fuente: varios periodistas lo grabaron desde sitios distintos y lo cuentan medios serios.</a:t>
+              <a:t>Una foto nueva, recortada o hecha con inteligencia artificial puede no salir.</a:t>
             </a:r>
           </a:p>
           <a:p>
@@ -4849,7 +4954,25 @@
                 </a:solidFill>
                 <a:latin typeface="Nunito Sans"/>
               </a:rPr>
-              <a:t>Todo apunta a que el vídeo es real.</a:t>
+              <a:t>No encontrar nada no </a:t>
+            </a:r>
+            <a:r>
+              <a:rPr sz="2400" b="1">
+                <a:solidFill>
+                  <a:srgbClr val="1F2A44"/>
+                </a:solidFill>
+                <a:latin typeface="Nunito Sans"/>
+              </a:rPr>
+              <a:t>prueba</a:t>
+            </a:r>
+            <a:r>
+              <a:rPr sz="2400" b="0">
+                <a:solidFill>
+                  <a:srgbClr val="1F2A44"/>
+                </a:solidFill>
+                <a:latin typeface="Nunito Sans"/>
+              </a:rPr>
+              <a:t> nada: ni que sea verdad ni que sea mentira.</a:t>
             </a:r>
           </a:p>
           <a:p>
@@ -4874,150 +4997,7 @@
                 </a:solidFill>
                 <a:latin typeface="Nunito Sans"/>
               </a:rPr>
-              <a:t>Conclusión: los deepfakes también sirven para negar vídeos reales. Ni «es real» ni «es falso» sin comprobar.</a:t>
-            </a:r>
-          </a:p>
-        </p:txBody>
-      </p:sp>
-    </p:spTree>
-  </p:cSld>
-  <p:clrMapOvr>
-    <a:masterClrMapping/>
-  </p:clrMapOvr>
-</p:sld>
-</file>
-
-<file path=ppt/slides/slide14.xml><?xml version="1.0" encoding="utf-8"?>
-<p:sld xmlns:a="http://schemas.openxmlformats.org/drawingml/2006/main" xmlns:p="http://schemas.openxmlformats.org/presentationml/2006/main" xmlns:r="http://schemas.openxmlformats.org/officeDocument/2006/relationships">
-  <p:cSld>
-    <p:bg>
-      <p:bgPr>
-        <a:solidFill>
-          <a:srgbClr val="FBF7EF"/>
-        </a:solidFill>
-        <a:effectLst/>
-      </p:bgPr>
-    </p:bg>
-    <p:spTree>
-      <p:nvGrpSpPr>
-        <p:cNvPr id="1" name=""/>
-        <p:cNvGrpSpPr/>
-        <p:nvPr/>
-      </p:nvGrpSpPr>
-      <p:grpSpPr/>
-      <p:sp>
-        <p:nvSpPr>
-          <p:cNvPr id="2" name="TextBox 1"/>
-          <p:cNvSpPr txBox="1"/>
-          <p:nvPr/>
-        </p:nvSpPr>
-        <p:spPr>
-          <a:xfrm>
-            <a:off x="640000" y="380000"/>
-            <a:ext cx="10912000" cy="420000"/>
-          </a:xfrm>
-          <a:prstGeom prst="rect">
-            <a:avLst/>
-          </a:prstGeom>
-          <a:noFill/>
-        </p:spPr>
-        <p:txBody>
-          <a:bodyPr wrap="square">
-            <a:spAutoFit/>
-          </a:bodyPr>
-          <a:lstStyle/>
-          <a:p>
-            <a:pPr>
-              <a:spcAft>
-                <a:spcPts val="630"/>
-              </a:spcAft>
-            </a:pPr>
-            <a:r>
-              <a:rPr sz="1400" b="1">
-                <a:solidFill>
-                  <a:srgbClr val="E8793A"/>
-                </a:solidFill>
-                <a:latin typeface="Nunito Sans"/>
-              </a:rPr>
-              <a:t>LO DE HOY EN TRES LÍNEAS</a:t>
-            </a:r>
-          </a:p>
-        </p:txBody>
-      </p:sp>
-      <p:sp>
-        <p:nvSpPr>
-          <p:cNvPr id="3" name="TextBox 2"/>
-          <p:cNvSpPr txBox="1"/>
-          <p:nvPr/>
-        </p:nvSpPr>
-        <p:spPr>
-          <a:xfrm>
-            <a:off x="640000" y="760000"/>
-            <a:ext cx="10912000" cy="800000"/>
-          </a:xfrm>
-          <a:prstGeom prst="rect">
-            <a:avLst/>
-          </a:prstGeom>
-          <a:noFill/>
-        </p:spPr>
-        <p:txBody>
-          <a:bodyPr wrap="square">
-            <a:spAutoFit/>
-          </a:bodyPr>
-          <a:lstStyle/>
-          <a:p>
-            <a:pPr>
-              <a:spcAft>
-                <a:spcPts val="1710"/>
-              </a:spcAft>
-            </a:pPr>
-            <a:r>
-              <a:rPr sz="3800" b="1">
-                <a:solidFill>
-                  <a:srgbClr val="1F2A44"/>
-                </a:solidFill>
-                <a:latin typeface="Fredoka"/>
-              </a:rPr>
-              <a:t>Escríbelo tú primero, sin mirar</a:t>
-            </a:r>
-          </a:p>
-        </p:txBody>
-      </p:sp>
-      <p:sp>
-        <p:nvSpPr>
-          <p:cNvPr id="4" name="TextBox 3"/>
-          <p:cNvSpPr txBox="1"/>
-          <p:nvPr/>
-        </p:nvSpPr>
-        <p:spPr>
-          <a:xfrm>
-            <a:off x="640000" y="1800000"/>
-            <a:ext cx="10912000" cy="1500000"/>
-          </a:xfrm>
-          <a:prstGeom prst="rect">
-            <a:avLst/>
-          </a:prstGeom>
-          <a:noFill/>
-        </p:spPr>
-        <p:txBody>
-          <a:bodyPr wrap="square">
-            <a:spAutoFit/>
-          </a:bodyPr>
-          <a:lstStyle/>
-          <a:p>
-            <a:pPr>
-              <a:spcAft>
-                <a:spcPts val="1170"/>
-              </a:spcAft>
-            </a:pPr>
-            <a:r>
-              <a:rPr sz="2600" b="0">
-                <a:solidFill>
-                  <a:srgbClr val="4A5568"/>
-                </a:solidFill>
-                <a:latin typeface="Nunito Sans"/>
-              </a:rPr>
-              <a:t>Dos minutos. Después lo comparamos.</a:t>
+              <a:t>Conclusión: verificar no siempre da respuesta. A veces lo honesto es «todavía no lo sé» y esperar.</a:t>
             </a:r>
           </a:p>
         </p:txBody>
@@ -5095,8 +5075,8 @@
         </p:nvSpPr>
         <p:spPr>
           <a:xfrm>
-            <a:off x="640000" y="1300000"/>
-            <a:ext cx="10912000" cy="4800000"/>
+            <a:off x="640000" y="760000"/>
+            <a:ext cx="10912000" cy="800000"/>
           </a:xfrm>
           <a:prstGeom prst="rect">
             <a:avLst/>
@@ -5111,76 +5091,56 @@
           <a:p>
             <a:pPr>
               <a:spcAft>
-                <a:spcPts val="1350"/>
-              </a:spcAft>
-            </a:pPr>
-            <a:r>
-              <a:rPr sz="3000" b="1">
-                <a:solidFill>
-                  <a:srgbClr val="E8793A"/>
-                </a:solidFill>
-                <a:latin typeface="Nunito Sans"/>
-              </a:rPr>
-              <a:t>1. </a:t>
-            </a:r>
-            <a:r>
-              <a:rPr sz="3000" b="0">
+                <a:spcPts val="1710"/>
+              </a:spcAft>
+            </a:pPr>
+            <a:r>
+              <a:rPr sz="3800" b="1">
                 <a:solidFill>
                   <a:srgbClr val="1F2A44"/>
                 </a:solidFill>
-                <a:latin typeface="Nunito Sans"/>
-              </a:rPr>
-              <a:t>Una imagen puede engañar con recortes, montajes, fuera de contexto o con deepfakes.</a:t>
-            </a:r>
-          </a:p>
-          <a:p>
-            <a:pPr>
-              <a:spcAft>
-                <a:spcPts val="1350"/>
-              </a:spcAft>
-            </a:pPr>
-            <a:r>
-              <a:rPr sz="3000" b="1">
-                <a:solidFill>
-                  <a:srgbClr val="E8793A"/>
-                </a:solidFill>
-                <a:latin typeface="Nunito Sans"/>
-              </a:rPr>
-              <a:t>2. </a:t>
-            </a:r>
-            <a:r>
-              <a:rPr sz="3000" b="0">
-                <a:solidFill>
-                  <a:srgbClr val="1F2A44"/>
-                </a:solidFill>
-                <a:latin typeface="Nunito Sans"/>
-              </a:rPr>
-              <a:t>Un deepfake es un vídeo, audio o imagen falso hecho con inteligencia artificial.</a:t>
-            </a:r>
-          </a:p>
-          <a:p>
-            <a:pPr>
-              <a:spcAft>
-                <a:spcPts val="1350"/>
-              </a:spcAft>
-            </a:pPr>
-            <a:r>
-              <a:rPr sz="3000" b="1">
-                <a:solidFill>
-                  <a:srgbClr val="E8793A"/>
-                </a:solidFill>
-                <a:latin typeface="Nunito Sans"/>
-              </a:rPr>
-              <a:t>3. </a:t>
-            </a:r>
-            <a:r>
-              <a:rPr sz="3000" b="0">
-                <a:solidFill>
-                  <a:srgbClr val="1F2A44"/>
-                </a:solidFill>
-                <a:latin typeface="Nunito Sans"/>
-              </a:rPr>
-              <a:t>Mirar bien ya no basta: busca el origen y la fuente antes de creer o compartir.</a:t>
+                <a:latin typeface="Fredoka"/>
+              </a:rPr>
+              <a:t>Escríbelo tú primero, sin mirar</a:t>
+            </a:r>
+          </a:p>
+        </p:txBody>
+      </p:sp>
+      <p:sp>
+        <p:nvSpPr>
+          <p:cNvPr id="4" name="TextBox 3"/>
+          <p:cNvSpPr txBox="1"/>
+          <p:nvPr/>
+        </p:nvSpPr>
+        <p:spPr>
+          <a:xfrm>
+            <a:off x="640000" y="1800000"/>
+            <a:ext cx="10912000" cy="1500000"/>
+          </a:xfrm>
+          <a:prstGeom prst="rect">
+            <a:avLst/>
+          </a:prstGeom>
+          <a:noFill/>
+        </p:spPr>
+        <p:txBody>
+          <a:bodyPr wrap="square">
+            <a:spAutoFit/>
+          </a:bodyPr>
+          <a:lstStyle/>
+          <a:p>
+            <a:pPr>
+              <a:spcAft>
+                <a:spcPts val="1170"/>
+              </a:spcAft>
+            </a:pPr>
+            <a:r>
+              <a:rPr sz="2600" b="0">
+                <a:solidFill>
+                  <a:srgbClr val="4A5568"/>
+                </a:solidFill>
+                <a:latin typeface="Nunito Sans"/>
+              </a:rPr>
+              <a:t>Dos minutos. Después lo comparamos.</a:t>
             </a:r>
           </a:p>
         </p:txBody>
@@ -5199,7 +5159,7 @@
     <p:bg>
       <p:bgPr>
         <a:solidFill>
-          <a:srgbClr val="1F2A44"/>
+          <a:srgbClr val="FBF7EF"/>
         </a:solidFill>
         <a:effectLst/>
       </p:bgPr>
@@ -5241,11 +5201,11 @@
             <a:r>
               <a:rPr sz="1400" b="1">
                 <a:solidFill>
-                  <a:srgbClr val="F4B183"/>
-                </a:solidFill>
-                <a:latin typeface="Nunito Sans"/>
-              </a:rPr>
-              <a:t>VÍDEO</a:t>
+                  <a:srgbClr val="E8793A"/>
+                </a:solidFill>
+                <a:latin typeface="Nunito Sans"/>
+              </a:rPr>
+              <a:t>LO DE HOY EN TRES LÍNEAS</a:t>
             </a:r>
           </a:p>
         </p:txBody>
@@ -5258,8 +5218,8 @@
         </p:nvSpPr>
         <p:spPr>
           <a:xfrm>
-            <a:off x="640000" y="760000"/>
-            <a:ext cx="10912000" cy="800000"/>
+            <a:off x="640000" y="1300000"/>
+            <a:ext cx="10912000" cy="4800000"/>
           </a:xfrm>
           <a:prstGeom prst="rect">
             <a:avLst/>
@@ -5274,56 +5234,76 @@
           <a:p>
             <a:pPr>
               <a:spcAft>
-                <a:spcPts val="1620"/>
-              </a:spcAft>
-            </a:pPr>
-            <a:r>
-              <a:rPr sz="3600" b="1">
-                <a:solidFill>
-                  <a:srgbClr val="FBF7EF"/>
-                </a:solidFill>
-                <a:latin typeface="Fredoka"/>
-              </a:rPr>
-              <a:t>Qué es un deepfake y cómo se puede detectar</a:t>
-            </a:r>
-          </a:p>
-        </p:txBody>
-      </p:sp>
-      <p:sp>
-        <p:nvSpPr>
-          <p:cNvPr id="4" name="TextBox 3"/>
-          <p:cNvSpPr txBox="1"/>
-          <p:nvPr/>
-        </p:nvSpPr>
-        <p:spPr>
-          <a:xfrm>
-            <a:off x="640000" y="2200000"/>
-            <a:ext cx="10912000" cy="2000000"/>
-          </a:xfrm>
-          <a:prstGeom prst="rect">
-            <a:avLst/>
-          </a:prstGeom>
-          <a:noFill/>
-        </p:spPr>
-        <p:txBody>
-          <a:bodyPr wrap="square">
-            <a:spAutoFit/>
-          </a:bodyPr>
-          <a:lstStyle/>
-          <a:p>
-            <a:pPr>
-              <a:spcAft>
-                <a:spcPts val="1080"/>
-              </a:spcAft>
-            </a:pPr>
-            <a:r>
-              <a:rPr sz="2400" b="0">
-                <a:solidFill>
-                  <a:srgbClr val="C9D3E6"/>
-                </a:solidFill>
-                <a:latin typeface="Nunito Sans"/>
-              </a:rPr>
-              <a:t>Que vean lo reales que pueden parecer los deepfakes y por qué no basta con mirar bien.</a:t>
+                <a:spcPts val="1350"/>
+              </a:spcAft>
+            </a:pPr>
+            <a:r>
+              <a:rPr sz="3000" b="1">
+                <a:solidFill>
+                  <a:srgbClr val="E8793A"/>
+                </a:solidFill>
+                <a:latin typeface="Nunito Sans"/>
+              </a:rPr>
+              <a:t>1. </a:t>
+            </a:r>
+            <a:r>
+              <a:rPr sz="3000" b="0">
+                <a:solidFill>
+                  <a:srgbClr val="1F2A44"/>
+                </a:solidFill>
+                <a:latin typeface="Nunito Sans"/>
+              </a:rPr>
+              <a:t>Verificar es comprobar antes de creer o compartir.</a:t>
+            </a:r>
+          </a:p>
+          <a:p>
+            <a:pPr>
+              <a:spcAft>
+                <a:spcPts val="1350"/>
+              </a:spcAft>
+            </a:pPr>
+            <a:r>
+              <a:rPr sz="3000" b="1">
+                <a:solidFill>
+                  <a:srgbClr val="E8793A"/>
+                </a:solidFill>
+                <a:latin typeface="Nunito Sans"/>
+              </a:rPr>
+              <a:t>2. </a:t>
+            </a:r>
+            <a:r>
+              <a:rPr sz="3000" b="0">
+                <a:solidFill>
+                  <a:srgbClr val="1F2A44"/>
+                </a:solidFill>
+                <a:latin typeface="Nunito Sans"/>
+              </a:rPr>
+              <a:t>La lectura lateral es salir de la página y mirar qué dicen otros.</a:t>
+            </a:r>
+          </a:p>
+          <a:p>
+            <a:pPr>
+              <a:spcAft>
+                <a:spcPts val="1350"/>
+              </a:spcAft>
+            </a:pPr>
+            <a:r>
+              <a:rPr sz="3000" b="1">
+                <a:solidFill>
+                  <a:srgbClr val="E8793A"/>
+                </a:solidFill>
+                <a:latin typeface="Nunito Sans"/>
+              </a:rPr>
+              <a:t>3. </a:t>
+            </a:r>
+            <a:r>
+              <a:rPr sz="3000" b="0">
+                <a:solidFill>
+                  <a:srgbClr val="1F2A44"/>
+                </a:solidFill>
+                <a:latin typeface="Nunito Sans"/>
+              </a:rPr>
+              <a:t>Mira la fecha y el origen de la imagen; si no encuentras nada, espera.</a:t>
             </a:r>
           </a:p>
         </p:txBody>
@@ -5388,6 +5368,149 @@
                 </a:solidFill>
                 <a:latin typeface="Nunito Sans"/>
               </a:rPr>
+              <a:t>VÍDEO</a:t>
+            </a:r>
+          </a:p>
+        </p:txBody>
+      </p:sp>
+      <p:sp>
+        <p:nvSpPr>
+          <p:cNvPr id="3" name="TextBox 2"/>
+          <p:cNvSpPr txBox="1"/>
+          <p:nvPr/>
+        </p:nvSpPr>
+        <p:spPr>
+          <a:xfrm>
+            <a:off x="640000" y="760000"/>
+            <a:ext cx="10912000" cy="800000"/>
+          </a:xfrm>
+          <a:prstGeom prst="rect">
+            <a:avLst/>
+          </a:prstGeom>
+          <a:noFill/>
+        </p:spPr>
+        <p:txBody>
+          <a:bodyPr wrap="square">
+            <a:spAutoFit/>
+          </a:bodyPr>
+          <a:lstStyle/>
+          <a:p>
+            <a:pPr>
+              <a:spcAft>
+                <a:spcPts val="1620"/>
+              </a:spcAft>
+            </a:pPr>
+            <a:r>
+              <a:rPr sz="3600" b="1">
+                <a:solidFill>
+                  <a:srgbClr val="FBF7EF"/>
+                </a:solidFill>
+                <a:latin typeface="Fredoka"/>
+              </a:rPr>
+              <a:t>Lectura lateral y búsqueda inversa de imágenes</a:t>
+            </a:r>
+          </a:p>
+        </p:txBody>
+      </p:sp>
+      <p:sp>
+        <p:nvSpPr>
+          <p:cNvPr id="4" name="TextBox 3"/>
+          <p:cNvSpPr txBox="1"/>
+          <p:nvPr/>
+        </p:nvSpPr>
+        <p:spPr>
+          <a:xfrm>
+            <a:off x="640000" y="2200000"/>
+            <a:ext cx="10912000" cy="2000000"/>
+          </a:xfrm>
+          <a:prstGeom prst="rect">
+            <a:avLst/>
+          </a:prstGeom>
+          <a:noFill/>
+        </p:spPr>
+        <p:txBody>
+          <a:bodyPr wrap="square">
+            <a:spAutoFit/>
+          </a:bodyPr>
+          <a:lstStyle/>
+          <a:p>
+            <a:pPr>
+              <a:spcAft>
+                <a:spcPts val="1080"/>
+              </a:spcAft>
+            </a:pPr>
+            <a:r>
+              <a:rPr sz="2400" b="0">
+                <a:solidFill>
+                  <a:srgbClr val="C9D3E6"/>
+                </a:solidFill>
+                <a:latin typeface="Nunito Sans"/>
+              </a:rPr>
+              <a:t>Que vean en pantalla cómo se hace la lectura lateral y una búsqueda inversa, paso a paso.</a:t>
+            </a:r>
+          </a:p>
+        </p:txBody>
+      </p:sp>
+    </p:spTree>
+  </p:cSld>
+  <p:clrMapOvr>
+    <a:masterClrMapping/>
+  </p:clrMapOvr>
+</p:sld>
+</file>
+
+<file path=ppt/slides/slide18.xml><?xml version="1.0" encoding="utf-8"?>
+<p:sld xmlns:a="http://schemas.openxmlformats.org/drawingml/2006/main" xmlns:p="http://schemas.openxmlformats.org/presentationml/2006/main" xmlns:r="http://schemas.openxmlformats.org/officeDocument/2006/relationships">
+  <p:cSld>
+    <p:bg>
+      <p:bgPr>
+        <a:solidFill>
+          <a:srgbClr val="1F2A44"/>
+        </a:solidFill>
+        <a:effectLst/>
+      </p:bgPr>
+    </p:bg>
+    <p:spTree>
+      <p:nvGrpSpPr>
+        <p:cNvPr id="1" name=""/>
+        <p:cNvGrpSpPr/>
+        <p:nvPr/>
+      </p:nvGrpSpPr>
+      <p:grpSpPr/>
+      <p:sp>
+        <p:nvSpPr>
+          <p:cNvPr id="2" name="TextBox 1"/>
+          <p:cNvSpPr txBox="1"/>
+          <p:nvPr/>
+        </p:nvSpPr>
+        <p:spPr>
+          <a:xfrm>
+            <a:off x="640000" y="380000"/>
+            <a:ext cx="10912000" cy="420000"/>
+          </a:xfrm>
+          <a:prstGeom prst="rect">
+            <a:avLst/>
+          </a:prstGeom>
+          <a:noFill/>
+        </p:spPr>
+        <p:txBody>
+          <a:bodyPr wrap="square">
+            <a:spAutoFit/>
+          </a:bodyPr>
+          <a:lstStyle/>
+          <a:p>
+            <a:pPr>
+              <a:spcAft>
+                <a:spcPts val="630"/>
+              </a:spcAft>
+            </a:pPr>
+            <a:r>
+              <a:rPr sz="1400" b="1">
+                <a:solidFill>
+                  <a:srgbClr val="F4B183"/>
+                </a:solidFill>
+                <a:latin typeface="Nunito Sans"/>
+              </a:rPr>
               <a:t>AHORA, LA HOJA DEL DÍA</a:t>
             </a:r>
           </a:p>
@@ -5981,7 +6104,7 @@
                 </a:solidFill>
                 <a:latin typeface="Nunito Sans"/>
               </a:rPr>
-              <a:t>______ es comprobar si una información es verdad antes de creerla o compartirla.  (sesión 34)</a:t>
+              <a:t>Un ______ es una mentira que se hace pasar por noticia verdadera.  (sesión 34)</a:t>
             </a:r>
           </a:p>
           <a:p>
@@ -6006,7 +6129,7 @@
                 </a:solidFill>
                 <a:latin typeface="Nunito Sans"/>
               </a:rPr>
-              <a:t>Para verificar una noticia, mira cuándo se ______, no cuándo te llegó.  (sesión 34)</a:t>
+              <a:t>Compartimos bulos porque nos ______ y porque lo manda alguien de confianza.  (sesión 34)</a:t>
             </a:r>
           </a:p>
           <a:p>
@@ -6031,7 +6154,7 @@
                 </a:solidFill>
                 <a:latin typeface="Nunito Sans"/>
               </a:rPr>
-              <a:t>Pregunta que desmonta el razonamiento circular: ¿la razón dice algo ______ de la conclusión?  (sesión 23)</a:t>
+              <a:t>En inglés, la pista falsa se llama red ______.  (sesión 23)</a:t>
             </a:r>
           </a:p>
         </p:txBody>
@@ -6177,13 +6300,22 @@
               <a:t>1. </a:t>
             </a:r>
             <a:r>
+              <a:rPr sz="2600" b="0">
+                <a:solidFill>
+                  <a:srgbClr val="1F2A44"/>
+                </a:solidFill>
+                <a:latin typeface="Nunito Sans"/>
+              </a:rPr>
+              <a:t>Un </a:t>
+            </a:r>
+            <a:r>
               <a:rPr sz="2600" b="1">
                 <a:solidFill>
                   <a:srgbClr val="1F2A44"/>
                 </a:solidFill>
                 <a:latin typeface="Nunito Sans"/>
               </a:rPr>
-              <a:t>Verificar</a:t>
+              <a:t>bulo</a:t>
             </a:r>
             <a:r>
               <a:rPr sz="2600" b="0">
@@ -6192,7 +6324,7 @@
                 </a:solidFill>
                 <a:latin typeface="Nunito Sans"/>
               </a:rPr>
-              <a:t> es comprobar si una información es verdad antes de creerla o compartirla.  (sesión 34)</a:t>
+              <a:t> es una mentira que se hace pasar por noticia verdadera.  (sesión 34)</a:t>
             </a:r>
           </a:p>
           <a:p>
@@ -6217,7 +6349,7 @@
                 </a:solidFill>
                 <a:latin typeface="Nunito Sans"/>
               </a:rPr>
-              <a:t>Para verificar una noticia, mira cuándo se </a:t>
+              <a:t>Compartimos bulos porque nos </a:t>
             </a:r>
             <a:r>
               <a:rPr sz="2600" b="1">
@@ -6226,7 +6358,7 @@
                 </a:solidFill>
                 <a:latin typeface="Nunito Sans"/>
               </a:rPr>
-              <a:t>publicó</a:t>
+              <a:t>emocionan</a:t>
             </a:r>
             <a:r>
               <a:rPr sz="2600" b="0">
@@ -6235,7 +6367,7 @@
                 </a:solidFill>
                 <a:latin typeface="Nunito Sans"/>
               </a:rPr>
-              <a:t>, no cuándo te llegó.  (sesión 34)</a:t>
+              <a:t> y porque lo manda alguien de confianza.  (sesión 34)</a:t>
             </a:r>
           </a:p>
           <a:p>
@@ -6260,7 +6392,7 @@
                 </a:solidFill>
                 <a:latin typeface="Nunito Sans"/>
               </a:rPr>
-              <a:t>Pregunta que desmonta el razonamiento circular: ¿la razón dice algo </a:t>
+              <a:t>En inglés, la pista falsa se llama red </a:t>
             </a:r>
             <a:r>
               <a:rPr sz="2600" b="1">
@@ -6269,7 +6401,7 @@
                 </a:solidFill>
                 <a:latin typeface="Nunito Sans"/>
               </a:rPr>
-              <a:t>distinto</a:t>
+              <a:t>herring</a:t>
             </a:r>
             <a:r>
               <a:rPr sz="2600" b="0">
@@ -6278,7 +6410,7 @@
                 </a:solidFill>
                 <a:latin typeface="Nunito Sans"/>
               </a:rPr>
-              <a:t> de la conclusión?  (sesión 23)</a:t>
+              <a:t>.  (sesión 23)</a:t>
             </a:r>
           </a:p>
         </p:txBody>
@@ -6425,7 +6557,7 @@
                 </a:solidFill>
                 <a:latin typeface="Nunito Sans"/>
               </a:rPr>
-              <a:t>Dicen que «una imagen vale más que mil palabras». Pero alguien eligió qué salía en la foto y qué se quedaba fuera.</a:t>
+              <a:t>Una web muy profesional, con logo bonito y muchas gráficas, dice que el wifi del instituto daña el cerebro.</a:t>
             </a:r>
           </a:p>
         </p:txBody>
@@ -6464,7 +6596,7 @@
                 </a:solidFill>
                 <a:latin typeface="Nunito Sans"/>
               </a:rPr>
-              <a:t>¿Te fías más de una foto que de un texto? ¿Por qué?</a:t>
+              <a:t>¿Cómo sabrías si esa web es de fiar sin leértela entera?</a:t>
             </a:r>
           </a:p>
         </p:txBody>
@@ -6568,7 +6700,7 @@
                 </a:solidFill>
                 <a:latin typeface="Fredoka"/>
               </a:rPr>
-              <a:t>Cuatro formas de engañar con imágenes</a:t>
+              <a:t>Tres pasos para verificar</a:t>
             </a:r>
           </a:p>
         </p:txBody>
@@ -6633,7 +6765,7 @@
                 </a:solidFill>
                 <a:latin typeface="Nunito Sans"/>
               </a:rPr>
-              <a:t>BLOQUE 1 · CUATRO FORMAS DE ENGAÑAR CON IMÁGENES</a:t>
+              <a:t>BLOQUE 1 · TRES PASOS PARA VERIFICAR</a:t>
             </a:r>
           </a:p>
         </p:txBody>
@@ -6672,378 +6804,209 @@
                 </a:solidFill>
                 <a:latin typeface="Fredoka"/>
               </a:rPr>
-              <a:t>Cuatro trucos</a:t>
-            </a:r>
-          </a:p>
-        </p:txBody>
-      </p:sp>
-      <p:graphicFrame>
-        <p:nvGraphicFramePr>
-          <p:cNvPr id="4" name="Table 3"/>
-          <p:cNvGraphicFramePr>
-            <a:graphicFrameLocks noGrp="1"/>
-          </p:cNvGraphicFramePr>
+              <a:t>Verificar</a:t>
+            </a:r>
+          </a:p>
+        </p:txBody>
+      </p:sp>
+      <p:sp>
+        <p:nvSpPr>
+          <p:cNvPr id="4" name="Rectangle 3"/>
+          <p:cNvSpPr/>
           <p:nvPr/>
-        </p:nvGraphicFramePr>
-        <p:xfrm>
-          <a:off x="640000" y="1700000"/>
-          <a:ext cx="10912000" cy="3000000"/>
-        </p:xfrm>
-        <a:graphic>
-          <a:graphicData uri="http://schemas.openxmlformats.org/drawingml/2006/table">
-            <a:tbl>
-              <a:tblPr firstRow="1" bandRow="1">
-                <a:tableStyleId>{5C22544A-7EE6-4342-B048-85BDC9FD1C3A}</a:tableStyleId>
-              </a:tblPr>
-              <a:tblGrid>
-                <a:gridCol w="3637333"/>
-                <a:gridCol w="3637333"/>
-                <a:gridCol w="3637334"/>
-              </a:tblGrid>
-              <a:tr h="600000">
-                <a:tc>
-                  <a:txBody>
-                    <a:bodyPr/>
-                    <a:lstStyle/>
-                    <a:p>
-                      <a:r>
-                        <a:rPr sz="2000" b="1">
-                          <a:solidFill>
-                            <a:srgbClr val="FBF7EF"/>
-                          </a:solidFill>
-                          <a:latin typeface="Fredoka"/>
-                        </a:rPr>
-                        <a:t>Truco</a:t>
-                      </a:r>
-                    </a:p>
-                  </a:txBody>
-                  <a:tcPr>
-                    <a:solidFill>
-                      <a:srgbClr val="1F2A44"/>
-                    </a:solidFill>
-                  </a:tcPr>
-                </a:tc>
-                <a:tc>
-                  <a:txBody>
-                    <a:bodyPr/>
-                    <a:lstStyle/>
-                    <a:p>
-                      <a:r>
-                        <a:rPr sz="2000" b="1">
-                          <a:solidFill>
-                            <a:srgbClr val="FBF7EF"/>
-                          </a:solidFill>
-                          <a:latin typeface="Fredoka"/>
-                        </a:rPr>
-                        <a:t>Qué es</a:t>
-                      </a:r>
-                    </a:p>
-                  </a:txBody>
-                  <a:tcPr>
-                    <a:solidFill>
-                      <a:srgbClr val="1F2A44"/>
-                    </a:solidFill>
-                  </a:tcPr>
-                </a:tc>
-                <a:tc>
-                  <a:txBody>
-                    <a:bodyPr/>
-                    <a:lstStyle/>
-                    <a:p>
-                      <a:r>
-                        <a:rPr sz="2000" b="1">
-                          <a:solidFill>
-                            <a:srgbClr val="FBF7EF"/>
-                          </a:solidFill>
-                          <a:latin typeface="Fredoka"/>
-                        </a:rPr>
-                        <a:t>Ejemplo</a:t>
-                      </a:r>
-                    </a:p>
-                  </a:txBody>
-                  <a:tcPr>
-                    <a:solidFill>
-                      <a:srgbClr val="1F2A44"/>
-                    </a:solidFill>
-                  </a:tcPr>
-                </a:tc>
-              </a:tr>
-              <a:tr h="600000">
-                <a:tc>
-                  <a:txBody>
-                    <a:bodyPr/>
-                    <a:lstStyle/>
-                    <a:p>
-                      <a:r>
-                        <a:rPr sz="2000" b="1">
-                          <a:solidFill>
-                            <a:srgbClr val="1F2A44"/>
-                          </a:solidFill>
-                          <a:latin typeface="Nunito Sans"/>
-                        </a:rPr>
-                        <a:t>Recorte</a:t>
-                      </a:r>
-                    </a:p>
-                  </a:txBody>
-                  <a:tcPr>
-                    <a:solidFill>
-                      <a:srgbClr val="FFFFFF"/>
-                    </a:solidFill>
-                  </a:tcPr>
-                </a:tc>
-                <a:tc>
-                  <a:txBody>
-                    <a:bodyPr/>
-                    <a:lstStyle/>
-                    <a:p>
-                      <a:r>
-                        <a:rPr sz="2000" b="0">
-                          <a:solidFill>
-                            <a:srgbClr val="1F2A44"/>
-                          </a:solidFill>
-                          <a:latin typeface="Nunito Sans"/>
-                        </a:rPr>
-                        <a:t>Se corta la foto para esconder una parte</a:t>
-                      </a:r>
-                    </a:p>
-                  </a:txBody>
-                  <a:tcPr>
-                    <a:solidFill>
-                      <a:srgbClr val="FFFFFF"/>
-                    </a:solidFill>
-                  </a:tcPr>
-                </a:tc>
-                <a:tc>
-                  <a:txBody>
-                    <a:bodyPr/>
-                    <a:lstStyle/>
-                    <a:p>
-                      <a:r>
-                        <a:rPr sz="2000" b="0">
-                          <a:solidFill>
-                            <a:srgbClr val="1F2A44"/>
-                          </a:solidFill>
-                          <a:latin typeface="Nunito Sans"/>
-                        </a:rPr>
-                        <a:t>Parece que hay poca gente; fuera, hay una multitud</a:t>
-                      </a:r>
-                    </a:p>
-                  </a:txBody>
-                  <a:tcPr>
-                    <a:solidFill>
-                      <a:srgbClr val="FFFFFF"/>
-                    </a:solidFill>
-                  </a:tcPr>
-                </a:tc>
-              </a:tr>
-              <a:tr h="600000">
-                <a:tc>
-                  <a:txBody>
-                    <a:bodyPr/>
-                    <a:lstStyle/>
-                    <a:p>
-                      <a:r>
-                        <a:rPr sz="2000" b="1">
-                          <a:solidFill>
-                            <a:srgbClr val="1F2A44"/>
-                          </a:solidFill>
-                          <a:latin typeface="Nunito Sans"/>
-                        </a:rPr>
-                        <a:t>Montaje</a:t>
-                      </a:r>
-                    </a:p>
-                  </a:txBody>
-                  <a:tcPr>
-                    <a:solidFill>
-                      <a:srgbClr val="EAF0F7"/>
-                    </a:solidFill>
-                  </a:tcPr>
-                </a:tc>
-                <a:tc>
-                  <a:txBody>
-                    <a:bodyPr/>
-                    <a:lstStyle/>
-                    <a:p>
-                      <a:r>
-                        <a:rPr sz="2000" b="0">
-                          <a:solidFill>
-                            <a:srgbClr val="1F2A44"/>
-                          </a:solidFill>
-                          <a:latin typeface="Nunito Sans"/>
-                        </a:rPr>
-                        <a:t>Se juntan o cambian partes de imágenes</a:t>
-                      </a:r>
-                    </a:p>
-                  </a:txBody>
-                  <a:tcPr>
-                    <a:solidFill>
-                      <a:srgbClr val="EAF0F7"/>
-                    </a:solidFill>
-                  </a:tcPr>
-                </a:tc>
-                <a:tc>
-                  <a:txBody>
-                    <a:bodyPr/>
-                    <a:lstStyle/>
-                    <a:p>
-                      <a:r>
-                        <a:rPr sz="2000" b="0">
-                          <a:solidFill>
-                            <a:srgbClr val="1F2A44"/>
-                          </a:solidFill>
-                          <a:latin typeface="Nunito Sans"/>
-                        </a:rPr>
-                        <a:t>El tiburón en la autopista (sesión 34)</a:t>
-                      </a:r>
-                    </a:p>
-                  </a:txBody>
-                  <a:tcPr>
-                    <a:solidFill>
-                      <a:srgbClr val="EAF0F7"/>
-                    </a:solidFill>
-                  </a:tcPr>
-                </a:tc>
-              </a:tr>
-              <a:tr h="600000">
-                <a:tc>
-                  <a:txBody>
-                    <a:bodyPr/>
-                    <a:lstStyle/>
-                    <a:p>
-                      <a:r>
-                        <a:rPr sz="2000" b="1">
-                          <a:solidFill>
-                            <a:srgbClr val="1F2A44"/>
-                          </a:solidFill>
-                          <a:latin typeface="Nunito Sans"/>
-                        </a:rPr>
-                        <a:t>Fuera de contexto</a:t>
-                      </a:r>
-                    </a:p>
-                  </a:txBody>
-                  <a:tcPr>
-                    <a:solidFill>
-                      <a:srgbClr val="FFFFFF"/>
-                    </a:solidFill>
-                  </a:tcPr>
-                </a:tc>
-                <a:tc>
-                  <a:txBody>
-                    <a:bodyPr/>
-                    <a:lstStyle/>
-                    <a:p>
-                      <a:r>
-                        <a:rPr sz="2000" b="0">
-                          <a:solidFill>
-                            <a:srgbClr val="1F2A44"/>
-                          </a:solidFill>
-                          <a:latin typeface="Nunito Sans"/>
-                        </a:rPr>
-                        <a:t>Foto real, pero de otro sitio o fecha</a:t>
-                      </a:r>
-                    </a:p>
-                  </a:txBody>
-                  <a:tcPr>
-                    <a:solidFill>
-                      <a:srgbClr val="FFFFFF"/>
-                    </a:solidFill>
-                  </a:tcPr>
-                </a:tc>
-                <a:tc>
-                  <a:txBody>
-                    <a:bodyPr/>
-                    <a:lstStyle/>
-                    <a:p>
-                      <a:r>
-                        <a:rPr sz="2000" b="0">
-                          <a:solidFill>
-                            <a:srgbClr val="1F2A44"/>
-                          </a:solidFill>
-                          <a:latin typeface="Nunito Sans"/>
-                        </a:rPr>
-                        <a:t>Una inundación de otro país como «Bilbao, ayer»</a:t>
-                      </a:r>
-                    </a:p>
-                  </a:txBody>
-                  <a:tcPr>
-                    <a:solidFill>
-                      <a:srgbClr val="FFFFFF"/>
-                    </a:solidFill>
-                  </a:tcPr>
-                </a:tc>
-              </a:tr>
-              <a:tr h="600000">
-                <a:tc>
-                  <a:txBody>
-                    <a:bodyPr/>
-                    <a:lstStyle/>
-                    <a:p>
-                      <a:r>
-                        <a:rPr sz="2000" b="1">
-                          <a:solidFill>
-                            <a:srgbClr val="1F2A44"/>
-                          </a:solidFill>
-                          <a:latin typeface="Nunito Sans"/>
-                        </a:rPr>
-                        <a:t>Deepfake</a:t>
-                      </a:r>
-                    </a:p>
-                  </a:txBody>
-                  <a:tcPr>
-                    <a:solidFill>
-                      <a:srgbClr val="EAF0F7"/>
-                    </a:solidFill>
-                  </a:tcPr>
-                </a:tc>
-                <a:tc>
-                  <a:txBody>
-                    <a:bodyPr/>
-                    <a:lstStyle/>
-                    <a:p>
-                      <a:r>
-                        <a:rPr sz="2000" b="0">
-                          <a:solidFill>
-                            <a:srgbClr val="1F2A44"/>
-                          </a:solidFill>
-                          <a:latin typeface="Nunito Sans"/>
-                        </a:rPr>
-                        <a:t>Vídeo o audio falso hecho con inteligencia artificial</a:t>
-                      </a:r>
-                    </a:p>
-                  </a:txBody>
-                  <a:tcPr>
-                    <a:solidFill>
-                      <a:srgbClr val="EAF0F7"/>
-                    </a:solidFill>
-                  </a:tcPr>
-                </a:tc>
-                <a:tc>
-                  <a:txBody>
-                    <a:bodyPr/>
-                    <a:lstStyle/>
-                    <a:p>
-                      <a:r>
-                        <a:rPr sz="2000" b="0">
-                          <a:solidFill>
-                            <a:srgbClr val="1F2A44"/>
-                          </a:solidFill>
-                          <a:latin typeface="Nunito Sans"/>
-                        </a:rPr>
-                        <a:t>Un famoso «dice» algo que nunca dijo</a:t>
-                      </a:r>
-                    </a:p>
-                  </a:txBody>
-                  <a:tcPr>
-                    <a:solidFill>
-                      <a:srgbClr val="EAF0F7"/>
-                    </a:solidFill>
-                  </a:tcPr>
-                </a:tc>
-              </a:tr>
-            </a:tbl>
-          </a:graphicData>
-        </a:graphic>
-      </p:graphicFrame>
+        </p:nvSpPr>
+        <p:spPr>
+          <a:xfrm>
+            <a:off x="640000" y="1650000"/>
+            <a:ext cx="10912000" cy="1150000"/>
+          </a:xfrm>
+          <a:prstGeom prst="rect">
+            <a:avLst/>
+          </a:prstGeom>
+          <a:solidFill>
+            <a:srgbClr val="EAF0F7"/>
+          </a:solidFill>
+          <a:ln>
+            <a:noFill/>
+          </a:ln>
+        </p:spPr>
+        <p:style>
+          <a:lnRef idx="1">
+            <a:schemeClr val="accent1"/>
+          </a:lnRef>
+          <a:fillRef idx="3">
+            <a:schemeClr val="accent1"/>
+          </a:fillRef>
+          <a:effectRef idx="2">
+            <a:schemeClr val="accent1"/>
+          </a:effectRef>
+          <a:fontRef idx="minor">
+            <a:schemeClr val="lt1"/>
+          </a:fontRef>
+        </p:style>
+        <p:txBody>
+          <a:bodyPr rtlCol="0" anchor="ctr"/>
+          <a:lstStyle/>
+          <a:p>
+            <a:pPr algn="ctr"/>
+          </a:p>
+        </p:txBody>
+      </p:sp>
+      <p:sp>
+        <p:nvSpPr>
+          <p:cNvPr id="5" name="TextBox 4"/>
+          <p:cNvSpPr txBox="1"/>
+          <p:nvPr/>
+        </p:nvSpPr>
+        <p:spPr>
+          <a:xfrm>
+            <a:off x="840000" y="1730000"/>
+            <a:ext cx="10512000" cy="1000000"/>
+          </a:xfrm>
+          <a:prstGeom prst="rect">
+            <a:avLst/>
+          </a:prstGeom>
+          <a:noFill/>
+        </p:spPr>
+        <p:txBody>
+          <a:bodyPr wrap="square" anchor="ctr">
+            <a:spAutoFit/>
+          </a:bodyPr>
+          <a:lstStyle/>
+          <a:p>
+            <a:pPr>
+              <a:spcAft>
+                <a:spcPts val="1260"/>
+              </a:spcAft>
+            </a:pPr>
+            <a:r>
+              <a:rPr sz="2800" b="1">
+                <a:solidFill>
+                  <a:srgbClr val="1F2A44"/>
+                </a:solidFill>
+                <a:latin typeface="Nunito Sans"/>
+              </a:rPr>
+              <a:t>Verificar es comprobar si una información es verdad antes de creerla o compartirla.</a:t>
+            </a:r>
+          </a:p>
+        </p:txBody>
+      </p:sp>
+      <p:sp>
+        <p:nvSpPr>
+          <p:cNvPr id="6" name="TextBox 5"/>
+          <p:cNvSpPr txBox="1"/>
+          <p:nvPr/>
+        </p:nvSpPr>
+        <p:spPr>
+          <a:xfrm>
+            <a:off x="640000" y="3000000"/>
+            <a:ext cx="10912000" cy="3458000"/>
+          </a:xfrm>
+          <a:prstGeom prst="rect">
+            <a:avLst/>
+          </a:prstGeom>
+          <a:noFill/>
+        </p:spPr>
+        <p:txBody>
+          <a:bodyPr wrap="square">
+            <a:spAutoFit/>
+          </a:bodyPr>
+          <a:lstStyle/>
+          <a:p>
+            <a:pPr>
+              <a:spcAft>
+                <a:spcPts val="1260"/>
+              </a:spcAft>
+            </a:pPr>
+            <a:r>
+              <a:rPr sz="2800" b="1">
+                <a:solidFill>
+                  <a:srgbClr val="E8793A"/>
+                </a:solidFill>
+                <a:latin typeface="Nunito Sans"/>
+              </a:rPr>
+              <a:t>• </a:t>
+            </a:r>
+            <a:r>
+              <a:rPr sz="2800" b="0">
+                <a:solidFill>
+                  <a:srgbClr val="1F2A44"/>
+                </a:solidFill>
+                <a:latin typeface="Nunito Sans"/>
+              </a:rPr>
+              <a:t>No hace falta ser experto: hay </a:t>
+            </a:r>
+            <a:r>
+              <a:rPr sz="2800" b="1">
+                <a:solidFill>
+                  <a:srgbClr val="1F2A44"/>
+                </a:solidFill>
+                <a:latin typeface="Nunito Sans"/>
+              </a:rPr>
+              <a:t>pasos</a:t>
+            </a:r>
+            <a:r>
+              <a:rPr sz="2800" b="0">
+                <a:solidFill>
+                  <a:srgbClr val="1F2A44"/>
+                </a:solidFill>
+                <a:latin typeface="Nunito Sans"/>
+              </a:rPr>
+              <a:t> sencillos</a:t>
+            </a:r>
+          </a:p>
+          <a:p>
+            <a:pPr>
+              <a:spcAft>
+                <a:spcPts val="1260"/>
+              </a:spcAft>
+            </a:pPr>
+            <a:r>
+              <a:rPr sz="2800" b="1">
+                <a:solidFill>
+                  <a:srgbClr val="E8793A"/>
+                </a:solidFill>
+                <a:latin typeface="Nunito Sans"/>
+              </a:rPr>
+              <a:t>• </a:t>
+            </a:r>
+            <a:r>
+              <a:rPr sz="2800" b="0">
+                <a:solidFill>
+                  <a:srgbClr val="1F2A44"/>
+                </a:solidFill>
+                <a:latin typeface="Nunito Sans"/>
+              </a:rPr>
+              <a:t>Paso 1: lectura lateral</a:t>
+            </a:r>
+          </a:p>
+          <a:p>
+            <a:pPr>
+              <a:spcAft>
+                <a:spcPts val="1260"/>
+              </a:spcAft>
+            </a:pPr>
+            <a:r>
+              <a:rPr sz="2800" b="1">
+                <a:solidFill>
+                  <a:srgbClr val="E8793A"/>
+                </a:solidFill>
+                <a:latin typeface="Nunito Sans"/>
+              </a:rPr>
+              <a:t>• </a:t>
+            </a:r>
+            <a:r>
+              <a:rPr sz="2800" b="0">
+                <a:solidFill>
+                  <a:srgbClr val="1F2A44"/>
+                </a:solidFill>
+                <a:latin typeface="Nunito Sans"/>
+              </a:rPr>
+              <a:t>Paso 2: la fecha. Paso 3: el origen de la imagen</a:t>
+            </a:r>
+          </a:p>
+        </p:txBody>
+      </p:sp>
     </p:spTree>
   </p:cSld>
   <p:clrMapOvr>
@@ -7104,7 +7067,7 @@
                 </a:solidFill>
                 <a:latin typeface="Nunito Sans"/>
               </a:rPr>
-              <a:t>BLOQUE 1 · CUATRO FORMAS DE ENGAÑAR CON IMÁGENES</a:t>
+              <a:t>BLOQUE 1 · TRES PASOS PARA VERIFICAR</a:t>
             </a:r>
           </a:p>
         </p:txBody>
@@ -7143,7 +7106,7 @@
                 </a:solidFill>
                 <a:latin typeface="Fredoka"/>
               </a:rPr>
-              <a:t>Deepfake</a:t>
+              <a:t>Lectura lateral</a:t>
             </a:r>
           </a:p>
         </p:txBody>
@@ -7225,7 +7188,7 @@
                 </a:solidFill>
                 <a:latin typeface="Nunito Sans"/>
               </a:rPr>
-              <a:t>Vídeo, audio o imagen hecho con inteligencia artificial que muestra a alguien diciendo o haciendo algo que nunca hizo.</a:t>
+              <a:t>Salir de la página y buscar en otras qué dicen de ella y de lo que cuenta.</a:t>
             </a:r>
           </a:p>
         </p:txBody>
@@ -7273,7 +7236,7 @@
                 </a:solidFill>
                 <a:latin typeface="Nunito Sans"/>
               </a:rPr>
-              <a:t>Cada vez son </a:t>
+              <a:t>Abre </a:t>
             </a:r>
             <a:r>
               <a:rPr sz="2800" b="1">
@@ -7282,7 +7245,7 @@
                 </a:solidFill>
                 <a:latin typeface="Nunito Sans"/>
               </a:rPr>
-              <a:t>más difíciles</a:t>
+              <a:t>otras pestañas</a:t>
             </a:r>
             <a:r>
               <a:rPr sz="2800" b="0">
@@ -7291,7 +7254,7 @@
                 </a:solidFill>
                 <a:latin typeface="Nunito Sans"/>
               </a:rPr>
-              <a:t> de detectar</a:t>
+              <a:t>: busca el nombre de la web o del autor</a:t>
             </a:r>
           </a:p>
           <a:p>
@@ -7316,7 +7279,7 @@
                 </a:solidFill>
                 <a:latin typeface="Nunito Sans"/>
               </a:rPr>
-              <a:t>Las pistas de antes (labios, manos raras) ya casi no sirven</a:t>
+              <a:t>¿Qué dicen de ella medios serios o verificadores?</a:t>
             </a:r>
           </a:p>
           <a:p>
@@ -7341,50 +7304,32 @@
                 </a:solidFill>
                 <a:latin typeface="Nunito Sans"/>
               </a:rPr>
-              <a:t>Mejor que mirar el vídeo: buscar la </a:t>
-            </a:r>
+              <a:t>¿Otras fuentes serias cuentan lo mismo?</a:t>
+            </a:r>
+          </a:p>
+          <a:p>
+            <a:pPr>
+              <a:spcAft>
+                <a:spcPts val="1260"/>
+              </a:spcAft>
+            </a:pPr>
             <a:r>
               <a:rPr sz="2800" b="1">
                 <a:solidFill>
+                  <a:srgbClr val="E8793A"/>
+                </a:solidFill>
+                <a:latin typeface="Nunito Sans"/>
+              </a:rPr>
+              <a:t>• </a:t>
+            </a:r>
+            <a:r>
+              <a:rPr sz="2800" b="0">
+                <a:solidFill>
                   <a:srgbClr val="1F2A44"/>
                 </a:solidFill>
                 <a:latin typeface="Nunito Sans"/>
               </a:rPr>
-              <a:t>fuente</a:t>
-            </a:r>
-          </a:p>
-          <a:p>
-            <a:pPr>
-              <a:spcAft>
-                <a:spcPts val="1260"/>
-              </a:spcAft>
-            </a:pPr>
-            <a:r>
-              <a:rPr sz="2800" b="1">
-                <a:solidFill>
-                  <a:srgbClr val="E8793A"/>
-                </a:solidFill>
-                <a:latin typeface="Nunito Sans"/>
-              </a:rPr>
-              <a:t>• </a:t>
-            </a:r>
-            <a:r>
-              <a:rPr sz="2800" b="0">
-                <a:solidFill>
-                  <a:srgbClr val="1F2A44"/>
-                </a:solidFill>
-                <a:latin typeface="Nunito Sans"/>
-              </a:rPr>
-              <a:t>Hacer un deepfake de alguien sin permiso puede ser un </a:t>
-            </a:r>
-            <a:r>
-              <a:rPr sz="2800" b="1">
-                <a:solidFill>
-                  <a:srgbClr val="1F2A44"/>
-                </a:solidFill>
-                <a:latin typeface="Nunito Sans"/>
-              </a:rPr>
-              <a:t>delito</a:t>
+              <a:t>Así trabajan los verificadores profesionales</a:t>
             </a:r>
           </a:p>
         </p:txBody>
@@ -7449,7 +7394,7 @@
                 </a:solidFill>
                 <a:latin typeface="Nunito Sans"/>
               </a:rPr>
-              <a:t>BLOQUE 1 · CUATRO FORMAS DE ENGAÑAR CON IMÁGENES</a:t>
+              <a:t>BLOQUE 1 · TRES PASOS PARA VERIFICAR</a:t>
             </a:r>
           </a:p>
         </p:txBody>
@@ -7488,21 +7433,64 @@
                 </a:solidFill>
                 <a:latin typeface="Fredoka"/>
               </a:rPr>
-              <a:t>Ante una imagen dudosa</a:t>
-            </a:r>
-          </a:p>
-        </p:txBody>
-      </p:sp>
-      <p:sp>
-        <p:nvSpPr>
-          <p:cNvPr id="4" name="TextBox 3"/>
+              <a:t>Leer en vertical o en lateral</a:t>
+            </a:r>
+          </a:p>
+        </p:txBody>
+      </p:sp>
+      <p:sp>
+        <p:nvSpPr>
+          <p:cNvPr id="4" name="Rectangle 3"/>
+          <p:cNvSpPr/>
+          <p:nvPr/>
+        </p:nvSpPr>
+        <p:spPr>
+          <a:xfrm>
+            <a:off x="640000" y="1650000"/>
+            <a:ext cx="5306000" cy="4400000"/>
+          </a:xfrm>
+          <a:prstGeom prst="rect">
+            <a:avLst/>
+          </a:prstGeom>
+          <a:solidFill>
+            <a:srgbClr val="FBE3D2"/>
+          </a:solidFill>
+          <a:ln>
+            <a:noFill/>
+          </a:ln>
+        </p:spPr>
+        <p:style>
+          <a:lnRef idx="1">
+            <a:schemeClr val="accent1"/>
+          </a:lnRef>
+          <a:fillRef idx="3">
+            <a:schemeClr val="accent1"/>
+          </a:fillRef>
+          <a:effectRef idx="2">
+            <a:schemeClr val="accent1"/>
+          </a:effectRef>
+          <a:fontRef idx="minor">
+            <a:schemeClr val="lt1"/>
+          </a:fontRef>
+        </p:style>
+        <p:txBody>
+          <a:bodyPr rtlCol="0" anchor="ctr"/>
+          <a:lstStyle/>
+          <a:p>
+            <a:pPr algn="ctr"/>
+          </a:p>
+        </p:txBody>
+      </p:sp>
+      <p:sp>
+        <p:nvSpPr>
+          <p:cNvPr id="5" name="TextBox 4"/>
           <p:cNvSpPr txBox="1"/>
           <p:nvPr/>
         </p:nvSpPr>
         <p:spPr>
           <a:xfrm>
-            <a:off x="640000" y="1650000"/>
-            <a:ext cx="10912000" cy="4808000"/>
+            <a:off x="840000" y="1750000"/>
+            <a:ext cx="4906000" cy="600000"/>
           </a:xfrm>
           <a:prstGeom prst="rect">
             <a:avLst/>
@@ -7523,6 +7511,45 @@
             <a:r>
               <a:rPr sz="2800" b="1">
                 <a:solidFill>
+                  <a:srgbClr val="C2531C"/>
+                </a:solidFill>
+                <a:latin typeface="Nunito Sans"/>
+              </a:rPr>
+              <a:t>En vertical (me quedo dentro)</a:t>
+            </a:r>
+          </a:p>
+        </p:txBody>
+      </p:sp>
+      <p:sp>
+        <p:nvSpPr>
+          <p:cNvPr id="6" name="TextBox 5"/>
+          <p:cNvSpPr txBox="1"/>
+          <p:nvPr/>
+        </p:nvSpPr>
+        <p:spPr>
+          <a:xfrm>
+            <a:off x="840000" y="2400000"/>
+            <a:ext cx="4906000" cy="3500000"/>
+          </a:xfrm>
+          <a:prstGeom prst="rect">
+            <a:avLst/>
+          </a:prstGeom>
+          <a:noFill/>
+        </p:spPr>
+        <p:txBody>
+          <a:bodyPr wrap="square">
+            <a:spAutoFit/>
+          </a:bodyPr>
+          <a:lstStyle/>
+          <a:p>
+            <a:pPr>
+              <a:spcAft>
+                <a:spcPts val="1170"/>
+              </a:spcAft>
+            </a:pPr>
+            <a:r>
+              <a:rPr sz="2600" b="1">
+                <a:solidFill>
                   <a:srgbClr val="E8793A"/>
                 </a:solidFill>
                 <a:latin typeface="Nunito Sans"/>
@@ -7530,32 +7557,228 @@
               <a:t>• </a:t>
             </a:r>
             <a:r>
+              <a:rPr sz="2600" b="0">
+                <a:solidFill>
+                  <a:srgbClr val="1F2A44"/>
+                </a:solidFill>
+                <a:latin typeface="Nunito Sans"/>
+              </a:rPr>
+              <a:t>Me fío por el diseño bonito</a:t>
+            </a:r>
+          </a:p>
+          <a:p>
+            <a:pPr>
+              <a:spcAft>
+                <a:spcPts val="1170"/>
+              </a:spcAft>
+            </a:pPr>
+            <a:r>
+              <a:rPr sz="2600" b="1">
+                <a:solidFill>
+                  <a:srgbClr val="E8793A"/>
+                </a:solidFill>
+                <a:latin typeface="Nunito Sans"/>
+              </a:rPr>
+              <a:t>• </a:t>
+            </a:r>
+            <a:r>
+              <a:rPr sz="2600" b="0">
+                <a:solidFill>
+                  <a:srgbClr val="1F2A44"/>
+                </a:solidFill>
+                <a:latin typeface="Nunito Sans"/>
+              </a:rPr>
+              <a:t>Leo el «Quiénes somos» de la propia web</a:t>
+            </a:r>
+          </a:p>
+          <a:p>
+            <a:pPr>
+              <a:spcAft>
+                <a:spcPts val="1170"/>
+              </a:spcAft>
+            </a:pPr>
+            <a:r>
+              <a:rPr sz="2600" b="1">
+                <a:solidFill>
+                  <a:srgbClr val="E8793A"/>
+                </a:solidFill>
+                <a:latin typeface="Nunito Sans"/>
+              </a:rPr>
+              <a:t>• </a:t>
+            </a:r>
+            <a:r>
+              <a:rPr sz="2600" b="0">
+                <a:solidFill>
+                  <a:srgbClr val="1F2A44"/>
+                </a:solidFill>
+                <a:latin typeface="Nunito Sans"/>
+              </a:rPr>
+              <a:t>Solo miro lo que la página quiere que vea</a:t>
+            </a:r>
+          </a:p>
+        </p:txBody>
+      </p:sp>
+      <p:sp>
+        <p:nvSpPr>
+          <p:cNvPr id="7" name="Rectangle 6"/>
+          <p:cNvSpPr/>
+          <p:nvPr/>
+        </p:nvSpPr>
+        <p:spPr>
+          <a:xfrm>
+            <a:off x="6246000" y="1650000"/>
+            <a:ext cx="5306000" cy="4400000"/>
+          </a:xfrm>
+          <a:prstGeom prst="rect">
+            <a:avLst/>
+          </a:prstGeom>
+          <a:solidFill>
+            <a:srgbClr val="EAF0F7"/>
+          </a:solidFill>
+          <a:ln>
+            <a:noFill/>
+          </a:ln>
+        </p:spPr>
+        <p:style>
+          <a:lnRef idx="1">
+            <a:schemeClr val="accent1"/>
+          </a:lnRef>
+          <a:fillRef idx="3">
+            <a:schemeClr val="accent1"/>
+          </a:fillRef>
+          <a:effectRef idx="2">
+            <a:schemeClr val="accent1"/>
+          </a:effectRef>
+          <a:fontRef idx="minor">
+            <a:schemeClr val="lt1"/>
+          </a:fontRef>
+        </p:style>
+        <p:txBody>
+          <a:bodyPr rtlCol="0" anchor="ctr"/>
+          <a:lstStyle/>
+          <a:p>
+            <a:pPr algn="ctr"/>
+          </a:p>
+        </p:txBody>
+      </p:sp>
+      <p:sp>
+        <p:nvSpPr>
+          <p:cNvPr id="8" name="TextBox 7"/>
+          <p:cNvSpPr txBox="1"/>
+          <p:nvPr/>
+        </p:nvSpPr>
+        <p:spPr>
+          <a:xfrm>
+            <a:off x="6446000" y="1750000"/>
+            <a:ext cx="4906000" cy="600000"/>
+          </a:xfrm>
+          <a:prstGeom prst="rect">
+            <a:avLst/>
+          </a:prstGeom>
+          <a:noFill/>
+        </p:spPr>
+        <p:txBody>
+          <a:bodyPr wrap="square">
+            <a:spAutoFit/>
+          </a:bodyPr>
+          <a:lstStyle/>
+          <a:p>
+            <a:pPr>
+              <a:spcAft>
+                <a:spcPts val="1260"/>
+              </a:spcAft>
+            </a:pPr>
+            <a:r>
               <a:rPr sz="2800" b="1">
                 <a:solidFill>
+                  <a:srgbClr val="2F6FB5"/>
+                </a:solidFill>
+                <a:latin typeface="Nunito Sans"/>
+              </a:rPr>
+              <a:t>En lateral (salgo fuera)</a:t>
+            </a:r>
+          </a:p>
+        </p:txBody>
+      </p:sp>
+      <p:sp>
+        <p:nvSpPr>
+          <p:cNvPr id="9" name="TextBox 8"/>
+          <p:cNvSpPr txBox="1"/>
+          <p:nvPr/>
+        </p:nvSpPr>
+        <p:spPr>
+          <a:xfrm>
+            <a:off x="6446000" y="2400000"/>
+            <a:ext cx="4906000" cy="3500000"/>
+          </a:xfrm>
+          <a:prstGeom prst="rect">
+            <a:avLst/>
+          </a:prstGeom>
+          <a:noFill/>
+        </p:spPr>
+        <p:txBody>
+          <a:bodyPr wrap="square">
+            <a:spAutoFit/>
+          </a:bodyPr>
+          <a:lstStyle/>
+          <a:p>
+            <a:pPr>
+              <a:spcAft>
+                <a:spcPts val="1170"/>
+              </a:spcAft>
+            </a:pPr>
+            <a:r>
+              <a:rPr sz="2600" b="1">
+                <a:solidFill>
+                  <a:srgbClr val="E8793A"/>
+                </a:solidFill>
+                <a:latin typeface="Nunito Sans"/>
+              </a:rPr>
+              <a:t>• </a:t>
+            </a:r>
+            <a:r>
+              <a:rPr sz="2600" b="0">
+                <a:solidFill>
                   <a:srgbClr val="1F2A44"/>
                 </a:solidFill>
                 <a:latin typeface="Nunito Sans"/>
               </a:rPr>
-              <a:t>Para:</a:t>
-            </a:r>
-            <a:r>
-              <a:rPr sz="2800" b="0">
+              <a:t>Busco qué dicen otros de esa web</a:t>
+            </a:r>
+          </a:p>
+          <a:p>
+            <a:pPr>
+              <a:spcAft>
+                <a:spcPts val="1170"/>
+              </a:spcAft>
+            </a:pPr>
+            <a:r>
+              <a:rPr sz="2600" b="1">
+                <a:solidFill>
+                  <a:srgbClr val="E8793A"/>
+                </a:solidFill>
+                <a:latin typeface="Nunito Sans"/>
+              </a:rPr>
+              <a:t>• </a:t>
+            </a:r>
+            <a:r>
+              <a:rPr sz="2600" b="0">
                 <a:solidFill>
                   <a:srgbClr val="1F2A44"/>
                 </a:solidFill>
                 <a:latin typeface="Nunito Sans"/>
               </a:rPr>
-              <a:t> si te da mucha emoción, sospecha</a:t>
-            </a:r>
-          </a:p>
-          <a:p>
-            <a:pPr>
-              <a:spcAft>
-                <a:spcPts val="1260"/>
-              </a:spcAft>
-            </a:pPr>
-            <a:r>
-              <a:rPr sz="2800" b="1">
+              <a:t>Compruebo si otras fuentes cuentan lo mismo</a:t>
+            </a:r>
+          </a:p>
+          <a:p>
+            <a:pPr>
+              <a:spcAft>
+                <a:spcPts val="1170"/>
+              </a:spcAft>
+            </a:pPr>
+            <a:r>
+              <a:rPr sz="2600" b="1">
                 <a:solidFill>
                   <a:srgbClr val="E8793A"/>
                 </a:solidFill>
@@ -7564,90 +7787,13 @@
               <a:t>• </a:t>
             </a:r>
             <a:r>
-              <a:rPr sz="2800" b="1">
+              <a:rPr sz="2600" b="0">
                 <a:solidFill>
                   <a:srgbClr val="1F2A44"/>
                 </a:solidFill>
                 <a:latin typeface="Nunito Sans"/>
               </a:rPr>
-              <a:t>Busca su origen:</a:t>
-            </a:r>
-            <a:r>
-              <a:rPr sz="2800" b="0">
-                <a:solidFill>
-                  <a:srgbClr val="1F2A44"/>
-                </a:solidFill>
-                <a:latin typeface="Nunito Sans"/>
-              </a:rPr>
-              <a:t> búsqueda inversa (sesión 34)</a:t>
-            </a:r>
-          </a:p>
-          <a:p>
-            <a:pPr>
-              <a:spcAft>
-                <a:spcPts val="1260"/>
-              </a:spcAft>
-            </a:pPr>
-            <a:r>
-              <a:rPr sz="2800" b="1">
-                <a:solidFill>
-                  <a:srgbClr val="E8793A"/>
-                </a:solidFill>
-                <a:latin typeface="Nunito Sans"/>
-              </a:rPr>
-              <a:t>• </a:t>
-            </a:r>
-            <a:r>
-              <a:rPr sz="2800" b="1">
-                <a:solidFill>
-                  <a:srgbClr val="1F2A44"/>
-                </a:solidFill>
-                <a:latin typeface="Nunito Sans"/>
-              </a:rPr>
-              <a:t>Mira el contexto:</a:t>
-            </a:r>
-            <a:r>
-              <a:rPr sz="2800" b="0">
-                <a:solidFill>
-                  <a:srgbClr val="1F2A44"/>
-                </a:solidFill>
-                <a:latin typeface="Nunito Sans"/>
-              </a:rPr>
-              <a:t> ¿quién la publicó, dónde y cuándo?</a:t>
-            </a:r>
-          </a:p>
-          <a:p>
-            <a:pPr>
-              <a:spcAft>
-                <a:spcPts val="1260"/>
-              </a:spcAft>
-            </a:pPr>
-            <a:r>
-              <a:rPr sz="2800" b="1">
-                <a:solidFill>
-                  <a:srgbClr val="E8793A"/>
-                </a:solidFill>
-                <a:latin typeface="Nunito Sans"/>
-              </a:rPr>
-              <a:t>• </a:t>
-            </a:r>
-            <a:r>
-              <a:rPr sz="2800" b="1">
-                <a:solidFill>
-                  <a:srgbClr val="1F2A44"/>
-                </a:solidFill>
-                <a:latin typeface="Nunito Sans"/>
-              </a:rPr>
-              <a:t>Busca la fuente:</a:t>
-            </a:r>
-            <a:r>
-              <a:rPr sz="2800" b="0">
-                <a:solidFill>
-                  <a:srgbClr val="1F2A44"/>
-                </a:solidFill>
-                <a:latin typeface="Nunito Sans"/>
-              </a:rPr>
-              <a:t> ¿lo cuentan medios serios o la propia persona?</a:t>
+              <a:t>En dos minutos sé mucho más</a:t>
             </a:r>
           </a:p>
         </p:txBody>
@@ -7666,7 +7812,7 @@
     <p:bg>
       <p:bgPr>
         <a:solidFill>
-          <a:srgbClr val="1F2A44"/>
+          <a:srgbClr val="FBF7EF"/>
         </a:solidFill>
         <a:effectLst/>
       </p:bgPr>
@@ -7686,8 +7832,8 @@
         </p:nvSpPr>
         <p:spPr>
           <a:xfrm>
-            <a:off x="640000" y="2300000"/>
-            <a:ext cx="10912000" cy="500000"/>
+            <a:off x="640000" y="380000"/>
+            <a:ext cx="10912000" cy="420000"/>
           </a:xfrm>
           <a:prstGeom prst="rect">
             <a:avLst/>
@@ -7702,17 +7848,17 @@
           <a:p>
             <a:pPr>
               <a:spcAft>
-                <a:spcPts val="810"/>
-              </a:spcAft>
-            </a:pPr>
-            <a:r>
-              <a:rPr sz="1800" b="1">
-                <a:solidFill>
-                  <a:srgbClr val="F4B183"/>
-                </a:solidFill>
-                <a:latin typeface="Nunito Sans"/>
-              </a:rPr>
-              <a:t>BLOQUE 2</a:t>
+                <a:spcPts val="630"/>
+              </a:spcAft>
+            </a:pPr>
+            <a:r>
+              <a:rPr sz="1400" b="1">
+                <a:solidFill>
+                  <a:srgbClr val="E8793A"/>
+                </a:solidFill>
+                <a:latin typeface="Nunito Sans"/>
+              </a:rPr>
+              <a:t>BLOQUE 1 · TRES PASOS PARA VERIFICAR</a:t>
             </a:r>
           </a:p>
         </p:txBody>
@@ -7725,7 +7871,7 @@
         </p:nvSpPr>
         <p:spPr>
           <a:xfrm>
-            <a:off x="640000" y="2800000"/>
+            <a:off x="640000" y="760000"/>
             <a:ext cx="10912000" cy="800000"/>
           </a:xfrm>
           <a:prstGeom prst="rect">
@@ -7741,17 +7887,176 @@
           <a:p>
             <a:pPr>
               <a:spcAft>
-                <a:spcPts val="2160"/>
-              </a:spcAft>
-            </a:pPr>
-            <a:r>
-              <a:rPr sz="4800" b="1">
-                <a:solidFill>
-                  <a:srgbClr val="FBF7EF"/>
+                <a:spcPts val="1710"/>
+              </a:spcAft>
+            </a:pPr>
+            <a:r>
+              <a:rPr sz="3800" b="1">
+                <a:solidFill>
+                  <a:srgbClr val="1F2A44"/>
                 </a:solidFill>
                 <a:latin typeface="Fredoka"/>
               </a:rPr>
-              <a:t>Casos resueltos</a:t>
+              <a:t>La fecha y el origen de la imagen</a:t>
+            </a:r>
+          </a:p>
+        </p:txBody>
+      </p:sp>
+      <p:sp>
+        <p:nvSpPr>
+          <p:cNvPr id="4" name="TextBox 3"/>
+          <p:cNvSpPr txBox="1"/>
+          <p:nvPr/>
+        </p:nvSpPr>
+        <p:spPr>
+          <a:xfrm>
+            <a:off x="640000" y="1650000"/>
+            <a:ext cx="10912000" cy="4808000"/>
+          </a:xfrm>
+          <a:prstGeom prst="rect">
+            <a:avLst/>
+          </a:prstGeom>
+          <a:noFill/>
+        </p:spPr>
+        <p:txBody>
+          <a:bodyPr wrap="square">
+            <a:spAutoFit/>
+          </a:bodyPr>
+          <a:lstStyle/>
+          <a:p>
+            <a:pPr>
+              <a:spcAft>
+                <a:spcPts val="1260"/>
+              </a:spcAft>
+            </a:pPr>
+            <a:r>
+              <a:rPr sz="2800" b="1">
+                <a:solidFill>
+                  <a:srgbClr val="E8793A"/>
+                </a:solidFill>
+                <a:latin typeface="Nunito Sans"/>
+              </a:rPr>
+              <a:t>• </a:t>
+            </a:r>
+            <a:r>
+              <a:rPr sz="2800" b="1">
+                <a:solidFill>
+                  <a:srgbClr val="1F2A44"/>
+                </a:solidFill>
+                <a:latin typeface="Nunito Sans"/>
+              </a:rPr>
+              <a:t>Fecha:</a:t>
+            </a:r>
+            <a:r>
+              <a:rPr sz="2800" b="0">
+                <a:solidFill>
+                  <a:srgbClr val="1F2A44"/>
+                </a:solidFill>
+                <a:latin typeface="Nunito Sans"/>
+              </a:rPr>
+              <a:t> una noticia vieja compartida hoy parece nueva</a:t>
+            </a:r>
+          </a:p>
+          <a:p>
+            <a:pPr>
+              <a:spcAft>
+                <a:spcPts val="1260"/>
+              </a:spcAft>
+            </a:pPr>
+            <a:r>
+              <a:rPr sz="2800" b="1">
+                <a:solidFill>
+                  <a:srgbClr val="E8793A"/>
+                </a:solidFill>
+                <a:latin typeface="Nunito Sans"/>
+              </a:rPr>
+              <a:t>• </a:t>
+            </a:r>
+            <a:r>
+              <a:rPr sz="2800" b="0">
+                <a:solidFill>
+                  <a:srgbClr val="1F2A44"/>
+                </a:solidFill>
+                <a:latin typeface="Nunito Sans"/>
+              </a:rPr>
+              <a:t>Mira cuándo se publicó, no cuándo te llegó</a:t>
+            </a:r>
+          </a:p>
+          <a:p>
+            <a:pPr>
+              <a:spcAft>
+                <a:spcPts val="1260"/>
+              </a:spcAft>
+            </a:pPr>
+            <a:r>
+              <a:rPr sz="2800" b="1">
+                <a:solidFill>
+                  <a:srgbClr val="E8793A"/>
+                </a:solidFill>
+                <a:latin typeface="Nunito Sans"/>
+              </a:rPr>
+              <a:t>• </a:t>
+            </a:r>
+            <a:r>
+              <a:rPr sz="2800" b="1">
+                <a:solidFill>
+                  <a:srgbClr val="1F2A44"/>
+                </a:solidFill>
+                <a:latin typeface="Nunito Sans"/>
+              </a:rPr>
+              <a:t>Imagen:</a:t>
+            </a:r>
+            <a:r>
+              <a:rPr sz="2800" b="0">
+                <a:solidFill>
+                  <a:srgbClr val="1F2A44"/>
+                </a:solidFill>
+                <a:latin typeface="Nunito Sans"/>
+              </a:rPr>
+              <a:t> haz una </a:t>
+            </a:r>
+            <a:r>
+              <a:rPr sz="2800" b="1">
+                <a:solidFill>
+                  <a:srgbClr val="1F2A44"/>
+                </a:solidFill>
+                <a:latin typeface="Nunito Sans"/>
+              </a:rPr>
+              <a:t>búsqueda inversa</a:t>
+            </a:r>
+            <a:r>
+              <a:rPr sz="2800" b="0">
+                <a:solidFill>
+                  <a:srgbClr val="1F2A44"/>
+                </a:solidFill>
+                <a:latin typeface="Nunito Sans"/>
+              </a:rPr>
+              <a:t> (por ejemplo, con Google Lens)</a:t>
+            </a:r>
+          </a:p>
+          <a:p>
+            <a:pPr>
+              <a:spcAft>
+                <a:spcPts val="1260"/>
+              </a:spcAft>
+            </a:pPr>
+            <a:r>
+              <a:rPr sz="2800" b="1">
+                <a:solidFill>
+                  <a:srgbClr val="E8793A"/>
+                </a:solidFill>
+                <a:latin typeface="Nunito Sans"/>
+              </a:rPr>
+              <a:t>• </a:t>
+            </a:r>
+            <a:r>
+              <a:rPr sz="2800" b="0">
+                <a:solidFill>
+                  <a:srgbClr val="1F2A44"/>
+                </a:solidFill>
+                <a:latin typeface="Nunito Sans"/>
+              </a:rPr>
+              <a:t>Puede enseñarte dónde apareció antes esa foto (no siempre la encuentra)</a:t>
             </a:r>
           </a:p>
         </p:txBody>
